--- a/Docs/MemoryRecycler3D_Final_Presentation.pptx
+++ b/Docs/MemoryRecycler3D_Final_Presentation.pptx
@@ -103,7 +103,7 @@
       </p:grpSpPr>
       <p:sp>
         <p:nvSpPr>
-          <p:cNvPr id="2" name="bg panel"/>
+          <p:cNvPr id="2" name="background"/>
           <p:cNvSpPr/>
           <p:nvPr/>
         </p:nvSpPr>
@@ -132,29 +132,29 @@
         <p:spPr>
           <a:xfrm>
             <a:off x="0" y="0"/>
-            <a:ext cx="12192000" cy="90000"/>
-          </a:xfrm>
-          <a:prstGeom prst="rect">
-            <a:avLst/>
-          </a:prstGeom>
-          <a:solidFill>
-            <a:srgbClr val="28D8E8"/>
-          </a:solidFill>
-          <a:ln>
-            <a:noFill/>
-          </a:ln>
-        </p:spPr>
-      </p:sp>
-      <p:sp>
-        <p:nvSpPr>
-          <p:cNvPr id="4" name="lens glow"/>
-          <p:cNvSpPr/>
-          <p:nvPr/>
-        </p:nvSpPr>
-        <p:spPr>
-          <a:xfrm>
-            <a:off x="10000000" y="250000"/>
-            <a:ext cx="1500000" cy="1500000"/>
+            <a:ext cx="12192000" cy="85000"/>
+          </a:xfrm>
+          <a:prstGeom prst="rect">
+            <a:avLst/>
+          </a:prstGeom>
+          <a:solidFill>
+            <a:srgbClr val="27D7E7"/>
+          </a:solidFill>
+          <a:ln>
+            <a:noFill/>
+          </a:ln>
+        </p:spPr>
+      </p:sp>
+      <p:sp>
+        <p:nvSpPr>
+          <p:cNvPr id="4" name="lens frame"/>
+          <p:cNvSpPr/>
+          <p:nvPr/>
+        </p:nvSpPr>
+        <p:spPr>
+          <a:xfrm>
+            <a:off x="10020000" y="260000"/>
+            <a:ext cx="1350000" cy="1350000"/>
           </a:xfrm>
           <a:prstGeom prst="roundRect">
             <a:avLst/>
@@ -164,21 +164,21 @@
           </a:solidFill>
           <a:ln w="19050">
             <a:solidFill>
-              <a:srgbClr val="28D8E8"/>
+              <a:srgbClr val="27D7E7"/>
             </a:solidFill>
           </a:ln>
         </p:spPr>
       </p:sp>
       <p:sp>
         <p:nvSpPr>
-          <p:cNvPr id="5" name="slide no"/>
-          <p:cNvSpPr/>
-          <p:nvPr/>
-        </p:nvSpPr>
-        <p:spPr>
-          <a:xfrm>
-            <a:off x="10800000" y="350000"/>
-            <a:ext cx="700000" cy="280000"/>
+          <p:cNvPr id="5" name="slide number"/>
+          <p:cNvSpPr/>
+          <p:nvPr/>
+        </p:nvSpPr>
+        <p:spPr>
+          <a:xfrm>
+            <a:off x="10820000" y="360000"/>
+            <a:ext cx="720000" cy="260000"/>
           </a:xfrm>
           <a:prstGeom prst="rect">
             <a:avLst/>
@@ -194,12 +194,12 @@
           <a:p>
             <a:pPr algn="ctr"/>
             <a:r>
-              <a:rPr lang="ko-KR" sz="1300" dirty="0">
+              <a:rPr lang="ko-KR" sz="1200" dirty="0">
                 <a:solidFill>
                   <a:srgbClr val="9FB4C0"/>
                 </a:solidFill>
                 <a:latin typeface="Malgun Gothic"/>
-                <a:ea typeface="Malgun Gothic"/>
+                <a:ea typeface="맑은 고딕"/>
               </a:rPr>
               <a:t>01/12</a:t>
             </a:r>
@@ -231,13 +231,13 @@
           <a:p>
             <a:pPr algn="l"/>
             <a:r>
-              <a:rPr lang="ko-KR" sz="2850" dirty="0">
+              <a:rPr lang="ko-KR" sz="2900" dirty="0">
                 <a:b/>
                 <a:solidFill>
                   <a:srgbClr val="FFFFFF"/>
                 </a:solidFill>
                 <a:latin typeface="Malgun Gothic"/>
-                <a:ea typeface="Malgun Gothic"/>
+                <a:ea typeface="맑은 고딕"/>
               </a:rPr>
               <a:t>Memory Recycler 3D</a:t>
             </a:r>
@@ -246,13 +246,50 @@
       </p:sp>
       <p:sp>
         <p:nvSpPr>
-          <p:cNvPr id="7" name="message"/>
-          <p:cNvSpPr/>
-          <p:nvPr/>
-        </p:nvSpPr>
-        <p:spPr>
-          <a:xfrm>
-            <a:off x="560000" y="1050000"/>
+          <p:cNvPr id="7" name="subtitle"/>
+          <p:cNvSpPr/>
+          <p:nvPr/>
+        </p:nvSpPr>
+        <p:spPr>
+          <a:xfrm>
+            <a:off x="560000" y="1000000"/>
+            <a:ext cx="7600000" cy="420000"/>
+          </a:xfrm>
+          <a:prstGeom prst="rect">
+            <a:avLst/>
+          </a:prstGeom>
+          <a:noFill/>
+          <a:ln>
+            <a:noFill/>
+          </a:ln>
+        </p:spPr>
+        <p:txBody>
+          <a:bodyPr wrap="square" anchor="mid"/>
+          <a:lstStyle/>
+          <a:p>
+            <a:pPr algn="l"/>
+            <a:r>
+              <a:rPr lang="ko-KR" sz="1500" dirty="0">
+                <a:solidFill>
+                  <a:srgbClr val="9FB4C0"/>
+                </a:solidFill>
+                <a:latin typeface="Malgun Gothic"/>
+                <a:ea typeface="맑은 고딕"/>
+              </a:rPr>
+              <a:t>기억 렌즈를 사용한 폐도시 기억 복원 퍼즐 게임</a:t>
+            </a:r>
+          </a:p>
+        </p:txBody>
+      </p:sp>
+      <p:sp>
+        <p:nvSpPr>
+          <p:cNvPr id="8" name="message"/>
+          <p:cNvSpPr/>
+          <p:nvPr/>
+        </p:nvSpPr>
+        <p:spPr>
+          <a:xfrm>
+            <a:off x="560000" y="1420000"/>
             <a:ext cx="8200000" cy="520000"/>
           </a:xfrm>
           <a:prstGeom prst="rect">
@@ -269,39 +306,39 @@
           <a:p>
             <a:pPr algn="l"/>
             <a:r>
-              <a:rPr lang="ko-KR" sz="1700" dirty="0">
+              <a:rPr lang="ko-KR" sz="1650" dirty="0">
                 <a:b/>
                 <a:solidFill>
-                  <a:srgbClr val="28D8E8"/>
-                </a:solidFill>
-                <a:latin typeface="Malgun Gothic"/>
-                <a:ea typeface="Malgun Gothic"/>
-              </a:rPr>
-              <a:t>???? ??? ???? 3D ?? ??</a:t>
-            </a:r>
-          </a:p>
-        </p:txBody>
-      </p:sp>
-      <p:sp>
-        <p:nvSpPr>
-          <p:cNvPr id="8" name="placeholder"/>
-          <p:cNvSpPr/>
-          <p:nvPr/>
-        </p:nvSpPr>
-        <p:spPr>
-          <a:xfrm>
-            <a:off x="7050000" y="1670000"/>
-            <a:ext cx="4350000" cy="3420000"/>
+                  <a:srgbClr val="27D7E7"/>
+                </a:solidFill>
+                <a:latin typeface="Malgun Gothic"/>
+                <a:ea typeface="맑은 고딕"/>
+              </a:rPr>
+              <a:t>기록창을 렌즈처럼 사용해 흩어진 기억을 복원하는 3D 퍼즐 게임</a:t>
+            </a:r>
+          </a:p>
+        </p:txBody>
+      </p:sp>
+      <p:sp>
+        <p:nvSpPr>
+          <p:cNvPr id="9" name="placeholder"/>
+          <p:cNvSpPr/>
+          <p:nvPr/>
+        </p:nvSpPr>
+        <p:spPr>
+          <a:xfrm>
+            <a:off x="7000000" y="1660000"/>
+            <a:ext cx="4380000" cy="3450000"/>
           </a:xfrm>
           <a:prstGeom prst="roundRect">
             <a:avLst/>
           </a:prstGeom>
           <a:solidFill>
-            <a:srgbClr val="0A141B"/>
+            <a:srgbClr val="08141B"/>
           </a:solidFill>
           <a:ln w="19050">
             <a:solidFill>
-              <a:srgbClr val="28D8E8"/>
+              <a:srgbClr val="27D7E7"/>
             </a:solidFill>
             <a:prstDash val="dash"/>
           </a:ln>
@@ -312,41 +349,41 @@
           <a:p>
             <a:pPr algn="ctr"/>
             <a:r>
-              <a:rPr lang="ko-KR" sz="1650" dirty="0">
+              <a:rPr lang="ko-KR" sz="1600" dirty="0">
                 <a:solidFill>
                   <a:srgbClr val="9FB4C0"/>
                 </a:solidFill>
                 <a:latin typeface="Malgun Gothic"/>
-                <a:ea typeface="Malgun Gothic"/>
-              </a:rPr>
-              <a:t>[???? ?? ??]</a:t>
+                <a:ea typeface="맑은 고딕"/>
+              </a:rPr>
+              <a:t>[스크린샷 삽입 예정]</a:t>
             </a:r>
           </a:p>
           <a:p>
             <a:pPr algn="ctr"/>
             <a:r>
-              <a:rPr lang="ko-KR" sz="1650" dirty="0">
+              <a:rPr lang="ko-KR" sz="1600" dirty="0">
                 <a:solidFill>
                   <a:srgbClr val="9FB4C0"/>
                 </a:solidFill>
                 <a:latin typeface="Malgun Gothic"/>
-                <a:ea typeface="Malgun Gothic"/>
-              </a:rPr>
-              <a:t>??? ?? ?? ??? ??</a:t>
-            </a:r>
-          </a:p>
-        </p:txBody>
-      </p:sp>
-      <p:sp>
-        <p:nvSpPr>
-          <p:cNvPr id="9" name="bullets"/>
-          <p:cNvSpPr/>
-          <p:nvPr/>
-        </p:nvSpPr>
-        <p:spPr>
-          <a:xfrm>
-            <a:off x="690000" y="1800000"/>
-            <a:ext cx="5850000" cy="3300000"/>
+                <a:ea typeface="맑은 고딕"/>
+              </a:rPr>
+              <a:t>시작 화면 또는 폐도시 전경</a:t>
+            </a:r>
+          </a:p>
+        </p:txBody>
+      </p:sp>
+      <p:sp>
+        <p:nvSpPr>
+          <p:cNvPr id="10" name="bullets"/>
+          <p:cNvSpPr/>
+          <p:nvPr/>
+        </p:nvSpPr>
+        <p:spPr>
+          <a:xfrm>
+            <a:off x="690000" y="1820000"/>
+            <a:ext cx="5850000" cy="3250000"/>
           </a:xfrm>
           <a:prstGeom prst="rect">
             <a:avLst/>
@@ -361,71 +398,71 @@
           <a:lstStyle/>
           <a:p>
             <a:pPr marL="342900" indent="-228600" algn="l">
-              <a:buChar char="?"/>
+              <a:buChar char="•"/>
             </a:pPr>
             <a:r>
-              <a:rPr lang="ko-KR" sz="1500" dirty="0">
+              <a:rPr lang="ko-KR" sz="1450" dirty="0">
                 <a:solidFill>
                   <a:srgbClr val="F2F8FF"/>
                 </a:solidFill>
                 <a:latin typeface="Malgun Gothic"/>
-                <a:ea typeface="Malgun Gothic"/>
-              </a:rPr>
-              <a:t>?? ?? ?? ? ?? ?? ?? ? ?? ?? ? ?? ????</a:t>
+                <a:ea typeface="맑은 고딕"/>
+              </a:rPr>
+              <a:t>기억 구체 수집 → 기억 렌즈 복원 → 선택 처리 → 중앙 아카이브</a:t>
             </a:r>
           </a:p>
           <a:p>
             <a:pPr marL="342900" indent="-228600" algn="l">
-              <a:buChar char="?"/>
+              <a:buChar char="•"/>
             </a:pPr>
             <a:r>
-              <a:rPr lang="ko-KR" sz="1500" dirty="0">
+              <a:rPr lang="ko-KR" sz="1450" dirty="0">
                 <a:solidFill>
                   <a:srgbClr val="F2F8FF"/>
                 </a:solidFill>
                 <a:latin typeface="Malgun Gothic"/>
-                <a:ea typeface="Malgun Gothic"/>
-              </a:rPr>
-              <a:t>???? ?? UI? ??? ?? ??? ??</a:t>
+                <a:ea typeface="맑은 고딕"/>
+              </a:rPr>
+              <a:t>Tab 기록창을 단순 메뉴가 아니라 기억 렌즈로 사용</a:t>
             </a:r>
           </a:p>
           <a:p>
             <a:pPr marL="342900" indent="-228600" algn="l">
-              <a:buChar char="?"/>
+              <a:buChar char="•"/>
             </a:pPr>
             <a:r>
-              <a:rPr lang="ko-KR" sz="1500" dirty="0">
+              <a:rPr lang="ko-KR" sz="1450" dirty="0">
                 <a:solidFill>
                   <a:srgbClr val="F2F8FF"/>
                 </a:solidFill>
                 <a:latin typeface="Malgun Gothic"/>
-                <a:ea typeface="Malgun Gothic"/>
-              </a:rPr>
-              <a:t>????? ????? ????? ???? ??</a:t>
-            </a:r>
-          </a:p>
-        </p:txBody>
-      </p:sp>
-      <p:sp>
-        <p:nvSpPr>
-          <p:cNvPr id="10" name="time"/>
-          <p:cNvSpPr/>
-          <p:nvPr/>
-        </p:nvSpPr>
-        <p:spPr>
-          <a:xfrm>
-            <a:off x="690000" y="6020000"/>
-            <a:ext cx="2500000" cy="320000"/>
+                <a:ea typeface="맑은 고딕"/>
+              </a:rPr>
+              <a:t>마지막에는 아카이브가 플레이어의 선택까지 기록</a:t>
+            </a:r>
+          </a:p>
+        </p:txBody>
+      </p:sp>
+      <p:sp>
+        <p:nvSpPr>
+          <p:cNvPr id="11" name="time"/>
+          <p:cNvSpPr/>
+          <p:nvPr/>
+        </p:nvSpPr>
+        <p:spPr>
+          <a:xfrm>
+            <a:off x="690000" y="6040000"/>
+            <a:ext cx="2500000" cy="310000"/>
           </a:xfrm>
           <a:prstGeom prst="roundRect">
             <a:avLst/>
           </a:prstGeom>
           <a:solidFill>
-            <a:srgbClr val="0E2230"/>
+            <a:srgbClr val="0D2230"/>
           </a:solidFill>
           <a:ln w="19050">
             <a:solidFill>
-              <a:srgbClr val="5F7783"/>
+              <a:srgbClr val="5D7480"/>
             </a:solidFill>
           </a:ln>
         </p:spPr>
@@ -435,28 +472,28 @@
           <a:p>
             <a:pPr algn="ctr"/>
             <a:r>
-              <a:rPr lang="ko-KR" sz="1200" dirty="0">
+              <a:rPr lang="ko-KR" sz="1150" dirty="0">
                 <a:solidFill>
                   <a:srgbClr val="9FB4C0"/>
                 </a:solidFill>
                 <a:latin typeface="Malgun Gothic"/>
-                <a:ea typeface="Malgun Gothic"/>
-              </a:rPr>
-              <a:t>?? ?? ??: 15?</a:t>
-            </a:r>
-          </a:p>
-        </p:txBody>
-      </p:sp>
-      <p:sp>
-        <p:nvSpPr>
-          <p:cNvPr id="11" name="footer"/>
-          <p:cNvSpPr/>
-          <p:nvPr/>
-        </p:nvSpPr>
-        <p:spPr>
-          <a:xfrm>
-            <a:off x="7700000" y="6060000"/>
-            <a:ext cx="3800000" cy="260000"/>
+                <a:ea typeface="맑은 고딕"/>
+              </a:rPr>
+              <a:t>예상 발표 시간: 15초</a:t>
+            </a:r>
+          </a:p>
+        </p:txBody>
+      </p:sp>
+      <p:sp>
+        <p:nvSpPr>
+          <p:cNvPr id="12" name="footer"/>
+          <p:cNvSpPr/>
+          <p:nvPr/>
+        </p:nvSpPr>
+        <p:spPr>
+          <a:xfrm>
+            <a:off x="7600000" y="6090000"/>
+            <a:ext cx="3920000" cy="240000"/>
           </a:xfrm>
           <a:prstGeom prst="rect">
             <a:avLst/>
@@ -472,14 +509,14 @@
           <a:p>
             <a:pPr algn="l"/>
             <a:r>
-              <a:rPr lang="ko-KR" sz="1050" dirty="0">
-                <a:solidFill>
-                  <a:srgbClr val="5F7783"/>
-                </a:solidFill>
-                <a:latin typeface="Malgun Gothic"/>
-                <a:ea typeface="Malgun Gothic"/>
-              </a:rPr>
-              <a:t>Memory Recycler 3D | 7? ?? ?? ??</a:t>
+              <a:rPr lang="ko-KR" sz="1000" dirty="0">
+                <a:solidFill>
+                  <a:srgbClr val="5D7480"/>
+                </a:solidFill>
+                <a:latin typeface="Malgun Gothic"/>
+                <a:ea typeface="맑은 고딕"/>
+              </a:rPr>
+              <a:t>Memory Recycler 3D | 7분 최종 발표 초안</a:t>
             </a:r>
           </a:p>
         </p:txBody>
@@ -511,7 +548,7 @@
       </p:grpSpPr>
       <p:sp>
         <p:nvSpPr>
-          <p:cNvPr id="2" name="bg panel"/>
+          <p:cNvPr id="2" name="background"/>
           <p:cNvSpPr/>
           <p:nvPr/>
         </p:nvSpPr>
@@ -540,29 +577,29 @@
         <p:spPr>
           <a:xfrm>
             <a:off x="0" y="0"/>
-            <a:ext cx="12192000" cy="90000"/>
-          </a:xfrm>
-          <a:prstGeom prst="rect">
-            <a:avLst/>
-          </a:prstGeom>
-          <a:solidFill>
-            <a:srgbClr val="28D8E8"/>
-          </a:solidFill>
-          <a:ln>
-            <a:noFill/>
-          </a:ln>
-        </p:spPr>
-      </p:sp>
-      <p:sp>
-        <p:nvSpPr>
-          <p:cNvPr id="4" name="lens glow"/>
-          <p:cNvSpPr/>
-          <p:nvPr/>
-        </p:nvSpPr>
-        <p:spPr>
-          <a:xfrm>
-            <a:off x="10000000" y="250000"/>
-            <a:ext cx="1500000" cy="1500000"/>
+            <a:ext cx="12192000" cy="85000"/>
+          </a:xfrm>
+          <a:prstGeom prst="rect">
+            <a:avLst/>
+          </a:prstGeom>
+          <a:solidFill>
+            <a:srgbClr val="27D7E7"/>
+          </a:solidFill>
+          <a:ln>
+            <a:noFill/>
+          </a:ln>
+        </p:spPr>
+      </p:sp>
+      <p:sp>
+        <p:nvSpPr>
+          <p:cNvPr id="4" name="lens frame"/>
+          <p:cNvSpPr/>
+          <p:nvPr/>
+        </p:nvSpPr>
+        <p:spPr>
+          <a:xfrm>
+            <a:off x="10020000" y="260000"/>
+            <a:ext cx="1350000" cy="1350000"/>
           </a:xfrm>
           <a:prstGeom prst="roundRect">
             <a:avLst/>
@@ -572,21 +609,21 @@
           </a:solidFill>
           <a:ln w="19050">
             <a:solidFill>
-              <a:srgbClr val="28D8E8"/>
+              <a:srgbClr val="27D7E7"/>
             </a:solidFill>
           </a:ln>
         </p:spPr>
       </p:sp>
       <p:sp>
         <p:nvSpPr>
-          <p:cNvPr id="5" name="slide no"/>
-          <p:cNvSpPr/>
-          <p:nvPr/>
-        </p:nvSpPr>
-        <p:spPr>
-          <a:xfrm>
-            <a:off x="10800000" y="350000"/>
-            <a:ext cx="700000" cy="280000"/>
+          <p:cNvPr id="5" name="slide number"/>
+          <p:cNvSpPr/>
+          <p:nvPr/>
+        </p:nvSpPr>
+        <p:spPr>
+          <a:xfrm>
+            <a:off x="10820000" y="360000"/>
+            <a:ext cx="720000" cy="260000"/>
           </a:xfrm>
           <a:prstGeom prst="rect">
             <a:avLst/>
@@ -602,12 +639,12 @@
           <a:p>
             <a:pPr algn="ctr"/>
             <a:r>
-              <a:rPr lang="ko-KR" sz="1300" dirty="0">
+              <a:rPr lang="ko-KR" sz="1200" dirty="0">
                 <a:solidFill>
                   <a:srgbClr val="9FB4C0"/>
                 </a:solidFill>
                 <a:latin typeface="Malgun Gothic"/>
-                <a:ea typeface="Malgun Gothic"/>
+                <a:ea typeface="맑은 고딕"/>
               </a:rPr>
               <a:t>10/12</a:t>
             </a:r>
@@ -639,15 +676,15 @@
           <a:p>
             <a:pPr algn="l"/>
             <a:r>
-              <a:rPr lang="ko-KR" sz="2850" dirty="0">
+              <a:rPr lang="ko-KR" sz="2900" dirty="0">
                 <a:b/>
                 <a:solidFill>
                   <a:srgbClr val="FFFFFF"/>
                 </a:solidFill>
                 <a:latin typeface="Malgun Gothic"/>
-                <a:ea typeface="Malgun Gothic"/>
-              </a:rPr>
-              <a:t>?? ??</a:t>
+                <a:ea typeface="맑은 고딕"/>
+              </a:rPr>
+              <a:t>시연 영상</a:t>
             </a:r>
           </a:p>
         </p:txBody>
@@ -677,15 +714,15 @@
           <a:p>
             <a:pPr algn="l"/>
             <a:r>
-              <a:rPr lang="ko-KR" sz="1700" dirty="0">
+              <a:rPr lang="ko-KR" sz="1650" dirty="0">
                 <a:b/>
                 <a:solidFill>
-                  <a:srgbClr val="28D8E8"/>
-                </a:solidFill>
-                <a:latin typeface="Malgun Gothic"/>
-                <a:ea typeface="Malgun Gothic"/>
-              </a:rPr>
-              <a:t>? ??? ?? ??? ?? ??? ????</a:t>
+                  <a:srgbClr val="27D7E7"/>
+                </a:solidFill>
+                <a:latin typeface="Malgun Gothic"/>
+                <a:ea typeface="맑은 고딕"/>
+              </a:rPr>
+              <a:t>핵심 루프와 기억 렌즈 퍼즐, 아카이브 심문을 2분 30초로 압축해 보여드립니다.</a:t>
             </a:r>
           </a:p>
         </p:txBody>
@@ -698,18 +735,18 @@
         </p:nvSpPr>
         <p:spPr>
           <a:xfrm>
-            <a:off x="7050000" y="1670000"/>
-            <a:ext cx="4350000" cy="3420000"/>
+            <a:off x="7000000" y="1660000"/>
+            <a:ext cx="4380000" cy="3450000"/>
           </a:xfrm>
           <a:prstGeom prst="roundRect">
             <a:avLst/>
           </a:prstGeom>
           <a:solidFill>
-            <a:srgbClr val="08151E"/>
+            <a:srgbClr val="08141B"/>
           </a:solidFill>
           <a:ln w="19050">
             <a:solidFill>
-              <a:srgbClr val="28D8E8"/>
+              <a:srgbClr val="27D7E7"/>
             </a:solidFill>
             <a:prstDash val="dash"/>
           </a:ln>
@@ -720,27 +757,27 @@
           <a:p>
             <a:pPr algn="ctr"/>
             <a:r>
-              <a:rPr lang="ko-KR" sz="1650" dirty="0">
+              <a:rPr lang="ko-KR" sz="1600" dirty="0">
                 <a:solidFill>
                   <a:srgbClr val="9FB4C0"/>
                 </a:solidFill>
                 <a:latin typeface="Malgun Gothic"/>
-                <a:ea typeface="Malgun Gothic"/>
-              </a:rPr>
-              <a:t>[?? ?? ?? ??]</a:t>
+                <a:ea typeface="맑은 고딕"/>
+              </a:rPr>
+              <a:t>[시연 영상 삽입 예정]</a:t>
             </a:r>
           </a:p>
           <a:p>
             <a:pPr algn="ctr"/>
             <a:r>
-              <a:rPr lang="ko-KR" sz="1650" dirty="0">
+              <a:rPr lang="ko-KR" sz="1600" dirty="0">
                 <a:solidFill>
                   <a:srgbClr val="9FB4C0"/>
                 </a:solidFill>
                 <a:latin typeface="Malgun Gothic"/>
-                <a:ea typeface="Malgun Gothic"/>
-              </a:rPr>
-              <a:t>?? ?? ?? ?? (2? 30?)</a:t>
+                <a:ea typeface="맑은 고딕"/>
+              </a:rPr>
+              <a:t>시연 영상 삽입 예정: 2분 30초</a:t>
             </a:r>
           </a:p>
         </p:txBody>
@@ -753,8 +790,8 @@
         </p:nvSpPr>
         <p:spPr>
           <a:xfrm>
-            <a:off x="690000" y="1800000"/>
-            <a:ext cx="5850000" cy="3300000"/>
+            <a:off x="690000" y="1820000"/>
+            <a:ext cx="5850000" cy="3250000"/>
           </a:xfrm>
           <a:prstGeom prst="rect">
             <a:avLst/>
@@ -769,47 +806,92 @@
           <a:lstStyle/>
           <a:p>
             <a:pPr marL="342900" indent="-228600" algn="l">
-              <a:buChar char="?"/>
+              <a:buChar char="•"/>
             </a:pPr>
             <a:r>
-              <a:rPr lang="ko-KR" sz="1500" dirty="0">
+              <a:rPr lang="ko-KR" sz="1450" dirty="0">
                 <a:solidFill>
                   <a:srgbClr val="F2F8FF"/>
                 </a:solidFill>
                 <a:latin typeface="Malgun Gothic"/>
-                <a:ea typeface="Malgun Gothic"/>
-              </a:rPr>
-              <a:t>?? ? ?? ?? ? ?? ?? ? ???? ?? ? ??</a:t>
+                <a:ea typeface="맑은 고딕"/>
+              </a:rPr>
+              <a:t>기억 구체 회수</a:t>
             </a:r>
           </a:p>
           <a:p>
             <a:pPr marL="342900" indent="-228600" algn="l">
-              <a:buChar char="?"/>
+              <a:buChar char="•"/>
             </a:pPr>
             <a:r>
-              <a:rPr lang="ko-KR" sz="1500" dirty="0">
+              <a:rPr lang="ko-KR" sz="1450" dirty="0">
                 <a:solidFill>
                   <a:srgbClr val="F2F8FF"/>
                 </a:solidFill>
                 <a:latin typeface="Malgun Gothic"/>
-                <a:ea typeface="Malgun Gothic"/>
-              </a:rPr>
-              <a:t>?? ??: 2? 30?</a:t>
+                <a:ea typeface="맑은 고딕"/>
+              </a:rPr>
+              <a:t>Tab 기억 렌즈</a:t>
             </a:r>
           </a:p>
           <a:p>
             <a:pPr marL="342900" indent="-228600" algn="l">
-              <a:buChar char="?"/>
+              <a:buChar char="•"/>
             </a:pPr>
             <a:r>
-              <a:rPr lang="ko-KR" sz="1500" dirty="0">
+              <a:rPr lang="ko-KR" sz="1450" dirty="0">
                 <a:solidFill>
                   <a:srgbClr val="F2F8FF"/>
                 </a:solidFill>
                 <a:latin typeface="Malgun Gothic"/>
-                <a:ea typeface="Malgun Gothic"/>
-              </a:rPr>
-              <a:t>?? ?? ??? ? ????? ?? ??? ??</a:t>
+                <a:ea typeface="맑은 고딕"/>
+              </a:rPr>
+              <a:t>LensAlign / LensOcclude / Stillness</a:t>
+            </a:r>
+          </a:p>
+          <a:p>
+            <a:pPr marL="342900" indent="-228600" algn="l">
+              <a:buChar char="•"/>
+            </a:pPr>
+            <a:r>
+              <a:rPr lang="ko-KR" sz="1450" dirty="0">
+                <a:solidFill>
+                  <a:srgbClr val="F2F8FF"/>
+                </a:solidFill>
+                <a:latin typeface="Malgun Gothic"/>
+                <a:ea typeface="맑은 고딕"/>
+              </a:rPr>
+              <a:t>보존 / 삭제 / 재가공 선택</a:t>
+            </a:r>
+          </a:p>
+          <a:p>
+            <a:pPr marL="342900" indent="-228600" algn="l">
+              <a:buChar char="•"/>
+            </a:pPr>
+            <a:r>
+              <a:rPr lang="ko-KR" sz="1450" dirty="0">
+                <a:solidFill>
+                  <a:srgbClr val="F2F8FF"/>
+                </a:solidFill>
+                <a:latin typeface="Malgun Gothic"/>
+                <a:ea typeface="맑은 고딕"/>
+              </a:rPr>
+              <a:t>아카이브 심문</a:t>
+            </a:r>
+          </a:p>
+          <a:p>
+            <a:pPr marL="342900" indent="-228600" algn="l">
+              <a:buChar char="•"/>
+            </a:pPr>
+            <a:r>
+              <a:rPr lang="ko-KR" sz="1450" dirty="0">
+                <a:solidFill>
+                  <a:srgbClr val="F2F8FF"/>
+                </a:solidFill>
+                <a:latin typeface="Malgun Gothic"/>
+                <a:ea typeface="맑은 고딕"/>
+              </a:rPr>
+              <a:t>엔딩</a:t>
             </a:r>
           </a:p>
         </p:txBody>
@@ -822,18 +904,18 @@
         </p:nvSpPr>
         <p:spPr>
           <a:xfrm>
-            <a:off x="690000" y="6020000"/>
-            <a:ext cx="2500000" cy="320000"/>
+            <a:off x="690000" y="6040000"/>
+            <a:ext cx="2500000" cy="310000"/>
           </a:xfrm>
           <a:prstGeom prst="roundRect">
             <a:avLst/>
           </a:prstGeom>
           <a:solidFill>
-            <a:srgbClr val="0E2230"/>
+            <a:srgbClr val="0D2230"/>
           </a:solidFill>
           <a:ln w="19050">
             <a:solidFill>
-              <a:srgbClr val="5F7783"/>
+              <a:srgbClr val="5D7480"/>
             </a:solidFill>
           </a:ln>
         </p:spPr>
@@ -843,14 +925,14 @@
           <a:p>
             <a:pPr algn="ctr"/>
             <a:r>
-              <a:rPr lang="ko-KR" sz="1200" dirty="0">
+              <a:rPr lang="ko-KR" sz="1150" dirty="0">
                 <a:solidFill>
                   <a:srgbClr val="9FB4C0"/>
                 </a:solidFill>
                 <a:latin typeface="Malgun Gothic"/>
-                <a:ea typeface="Malgun Gothic"/>
-              </a:rPr>
-              <a:t>?? ?? ??: 2? 30?</a:t>
+                <a:ea typeface="맑은 고딕"/>
+              </a:rPr>
+              <a:t>예상 발표 시간: 2분 30초</a:t>
             </a:r>
           </a:p>
         </p:txBody>
@@ -863,8 +945,8 @@
         </p:nvSpPr>
         <p:spPr>
           <a:xfrm>
-            <a:off x="7700000" y="6060000"/>
-            <a:ext cx="3800000" cy="260000"/>
+            <a:off x="7600000" y="6090000"/>
+            <a:ext cx="3920000" cy="240000"/>
           </a:xfrm>
           <a:prstGeom prst="rect">
             <a:avLst/>
@@ -880,14 +962,14 @@
           <a:p>
             <a:pPr algn="l"/>
             <a:r>
-              <a:rPr lang="ko-KR" sz="1050" dirty="0">
-                <a:solidFill>
-                  <a:srgbClr val="5F7783"/>
-                </a:solidFill>
-                <a:latin typeface="Malgun Gothic"/>
-                <a:ea typeface="Malgun Gothic"/>
-              </a:rPr>
-              <a:t>Memory Recycler 3D | 7? ?? ?? ??</a:t>
+              <a:rPr lang="ko-KR" sz="1000" dirty="0">
+                <a:solidFill>
+                  <a:srgbClr val="5D7480"/>
+                </a:solidFill>
+                <a:latin typeface="Malgun Gothic"/>
+                <a:ea typeface="맑은 고딕"/>
+              </a:rPr>
+              <a:t>Memory Recycler 3D | 7분 최종 발표 초안</a:t>
             </a:r>
           </a:p>
         </p:txBody>
@@ -919,7 +1001,7 @@
       </p:grpSpPr>
       <p:sp>
         <p:nvSpPr>
-          <p:cNvPr id="2" name="bg panel"/>
+          <p:cNvPr id="2" name="background"/>
           <p:cNvSpPr/>
           <p:nvPr/>
         </p:nvSpPr>
@@ -948,29 +1030,29 @@
         <p:spPr>
           <a:xfrm>
             <a:off x="0" y="0"/>
-            <a:ext cx="12192000" cy="90000"/>
-          </a:xfrm>
-          <a:prstGeom prst="rect">
-            <a:avLst/>
-          </a:prstGeom>
-          <a:solidFill>
-            <a:srgbClr val="28D8E8"/>
-          </a:solidFill>
-          <a:ln>
-            <a:noFill/>
-          </a:ln>
-        </p:spPr>
-      </p:sp>
-      <p:sp>
-        <p:nvSpPr>
-          <p:cNvPr id="4" name="lens glow"/>
-          <p:cNvSpPr/>
-          <p:nvPr/>
-        </p:nvSpPr>
-        <p:spPr>
-          <a:xfrm>
-            <a:off x="10000000" y="250000"/>
-            <a:ext cx="1500000" cy="1500000"/>
+            <a:ext cx="12192000" cy="85000"/>
+          </a:xfrm>
+          <a:prstGeom prst="rect">
+            <a:avLst/>
+          </a:prstGeom>
+          <a:solidFill>
+            <a:srgbClr val="27D7E7"/>
+          </a:solidFill>
+          <a:ln>
+            <a:noFill/>
+          </a:ln>
+        </p:spPr>
+      </p:sp>
+      <p:sp>
+        <p:nvSpPr>
+          <p:cNvPr id="4" name="lens frame"/>
+          <p:cNvSpPr/>
+          <p:nvPr/>
+        </p:nvSpPr>
+        <p:spPr>
+          <a:xfrm>
+            <a:off x="10020000" y="260000"/>
+            <a:ext cx="1350000" cy="1350000"/>
           </a:xfrm>
           <a:prstGeom prst="roundRect">
             <a:avLst/>
@@ -980,21 +1062,21 @@
           </a:solidFill>
           <a:ln w="19050">
             <a:solidFill>
-              <a:srgbClr val="28D8E8"/>
+              <a:srgbClr val="27D7E7"/>
             </a:solidFill>
           </a:ln>
         </p:spPr>
       </p:sp>
       <p:sp>
         <p:nvSpPr>
-          <p:cNvPr id="5" name="slide no"/>
-          <p:cNvSpPr/>
-          <p:nvPr/>
-        </p:nvSpPr>
-        <p:spPr>
-          <a:xfrm>
-            <a:off x="10800000" y="350000"/>
-            <a:ext cx="700000" cy="280000"/>
+          <p:cNvPr id="5" name="slide number"/>
+          <p:cNvSpPr/>
+          <p:nvPr/>
+        </p:nvSpPr>
+        <p:spPr>
+          <a:xfrm>
+            <a:off x="10820000" y="360000"/>
+            <a:ext cx="720000" cy="260000"/>
           </a:xfrm>
           <a:prstGeom prst="rect">
             <a:avLst/>
@@ -1010,12 +1092,12 @@
           <a:p>
             <a:pPr algn="ctr"/>
             <a:r>
-              <a:rPr lang="ko-KR" sz="1300" dirty="0">
+              <a:rPr lang="ko-KR" sz="1200" dirty="0">
                 <a:solidFill>
                   <a:srgbClr val="9FB4C0"/>
                 </a:solidFill>
                 <a:latin typeface="Malgun Gothic"/>
-                <a:ea typeface="Malgun Gothic"/>
+                <a:ea typeface="맑은 고딕"/>
               </a:rPr>
               <a:t>11/12</a:t>
             </a:r>
@@ -1047,15 +1129,15 @@
           <a:p>
             <a:pPr algn="l"/>
             <a:r>
-              <a:rPr lang="ko-KR" sz="2850" dirty="0">
+              <a:rPr lang="ko-KR" sz="2900" dirty="0">
                 <a:b/>
                 <a:solidFill>
                   <a:srgbClr val="FFFFFF"/>
                 </a:solidFill>
                 <a:latin typeface="Malgun Gothic"/>
-                <a:ea typeface="Malgun Gothic"/>
-              </a:rPr>
-              <a:t>??? ? ?? ??</a:t>
+                <a:ea typeface="맑은 고딕"/>
+              </a:rPr>
+              <a:t>한계점 및 개선 방향</a:t>
             </a:r>
           </a:p>
         </p:txBody>
@@ -1085,15 +1167,15 @@
           <a:p>
             <a:pPr algn="l"/>
             <a:r>
-              <a:rPr lang="ko-KR" sz="1700" dirty="0">
+              <a:rPr lang="ko-KR" sz="1650" dirty="0">
                 <a:b/>
                 <a:solidFill>
-                  <a:srgbClr val="28D8E8"/>
-                </a:solidFill>
-                <a:latin typeface="Malgun Gothic"/>
-                <a:ea typeface="Malgun Gothic"/>
-              </a:rPr>
-              <a:t>3? ?? ??? 8? ?? ??? ??? ? ??</a:t>
+                  <a:srgbClr val="27D7E7"/>
+                </a:solidFill>
+                <a:latin typeface="Malgun Gothic"/>
+                <a:ea typeface="맑은 고딕"/>
+              </a:rPr>
+              <a:t>핵심 시스템은 구현했지만 콘텐츠와 연출 확장이 필요합니다.</a:t>
             </a:r>
           </a:p>
         </p:txBody>
@@ -1106,18 +1188,18 @@
         </p:nvSpPr>
         <p:spPr>
           <a:xfrm>
-            <a:off x="7050000" y="1670000"/>
-            <a:ext cx="4350000" cy="3420000"/>
+            <a:off x="7000000" y="1660000"/>
+            <a:ext cx="4380000" cy="3450000"/>
           </a:xfrm>
           <a:prstGeom prst="roundRect">
             <a:avLst/>
           </a:prstGeom>
           <a:solidFill>
-            <a:srgbClr val="0A141B"/>
+            <a:srgbClr val="08141B"/>
           </a:solidFill>
           <a:ln w="19050">
             <a:solidFill>
-              <a:srgbClr val="28D8E8"/>
+              <a:srgbClr val="27D7E7"/>
             </a:solidFill>
             <a:prstDash val="dash"/>
           </a:ln>
@@ -1128,27 +1210,27 @@
           <a:p>
             <a:pPr algn="ctr"/>
             <a:r>
-              <a:rPr lang="ko-KR" sz="1650" dirty="0">
+              <a:rPr lang="ko-KR" sz="1600" dirty="0">
                 <a:solidFill>
                   <a:srgbClr val="9FB4C0"/>
                 </a:solidFill>
                 <a:latin typeface="Malgun Gothic"/>
-                <a:ea typeface="Malgun Gothic"/>
-              </a:rPr>
-              <a:t>[???? ?? ??]</a:t>
+                <a:ea typeface="맑은 고딕"/>
+              </a:rPr>
+              <a:t>[스크린샷 삽입 예정]</a:t>
             </a:r>
           </a:p>
           <a:p>
             <a:pPr algn="ctr"/>
             <a:r>
-              <a:rPr lang="ko-KR" sz="1650" dirty="0">
+              <a:rPr lang="ko-KR" sz="1600" dirty="0">
                 <a:solidFill>
                   <a:srgbClr val="9FB4C0"/>
                 </a:solidFill>
                 <a:latin typeface="Malgun Gothic"/>
-                <a:ea typeface="Malgun Gothic"/>
-              </a:rPr>
-              <a:t>?? ?? / ?? ?? ?</a:t>
+                <a:ea typeface="맑은 고딕"/>
+              </a:rPr>
+              <a:t>중앙 아카이브 또는 엔딩 화면</a:t>
             </a:r>
           </a:p>
         </p:txBody>
@@ -1161,8 +1243,8 @@
         </p:nvSpPr>
         <p:spPr>
           <a:xfrm>
-            <a:off x="690000" y="1800000"/>
-            <a:ext cx="5850000" cy="3300000"/>
+            <a:off x="690000" y="1820000"/>
+            <a:ext cx="5850000" cy="3250000"/>
           </a:xfrm>
           <a:prstGeom prst="rect">
             <a:avLst/>
@@ -1177,62 +1259,62 @@
           <a:lstStyle/>
           <a:p>
             <a:pPr marL="342900" indent="-228600" algn="l">
-              <a:buChar char="?"/>
+              <a:buChar char="•"/>
             </a:pPr>
             <a:r>
-              <a:rPr lang="ko-KR" sz="1500" dirty="0">
+              <a:rPr lang="ko-KR" sz="1450" dirty="0">
                 <a:solidFill>
                   <a:srgbClr val="F2F8FF"/>
                 </a:solidFill>
                 <a:latin typeface="Malgun Gothic"/>
-                <a:ea typeface="Malgun Gothic"/>
-              </a:rPr>
-              <a:t>??: 8? ?? ? 3? ?? ?? ??</a:t>
+                <a:ea typeface="맑은 고딕"/>
+              </a:rPr>
+              <a:t>기억 데이터 8개 중 특수 렌즈 퍼즐은 3개</a:t>
             </a:r>
           </a:p>
           <a:p>
             <a:pPr marL="342900" indent="-228600" algn="l">
-              <a:buChar char="?"/>
+              <a:buChar char="•"/>
             </a:pPr>
             <a:r>
-              <a:rPr lang="ko-KR" sz="1500" dirty="0">
+              <a:rPr lang="ko-KR" sz="1450" dirty="0">
                 <a:solidFill>
                   <a:srgbClr val="F2F8FF"/>
                 </a:solidFill>
                 <a:latin typeface="Malgun Gothic"/>
-                <a:ea typeface="Malgun Gothic"/>
-              </a:rPr>
-              <a:t>??: 8? ?? ??? ?? ?? ???? ??</a:t>
+                <a:ea typeface="맑은 고딕"/>
+              </a:rPr>
+              <a:t>폐도시 공간과 스토리 반전 보강 필요</a:t>
             </a:r>
           </a:p>
           <a:p>
             <a:pPr marL="342900" indent="-228600" algn="l">
-              <a:buChar char="?"/>
+              <a:buChar char="•"/>
             </a:pPr>
             <a:r>
-              <a:rPr lang="ko-KR" sz="1500" dirty="0">
+              <a:rPr lang="ko-KR" sz="1450" dirty="0">
                 <a:solidFill>
                   <a:srgbClr val="F2F8FF"/>
                 </a:solidFill>
                 <a:latin typeface="Malgun Gothic"/>
-                <a:ea typeface="Malgun Gothic"/>
-              </a:rPr>
-              <a:t>?? ??? ?? ?? ???</a:t>
+                <a:ea typeface="맑은 고딕"/>
+              </a:rPr>
+              <a:t>사운드와 카메라 연출 추가 가능</a:t>
             </a:r>
           </a:p>
           <a:p>
             <a:pPr marL="342900" indent="-228600" algn="l">
-              <a:buChar char="?"/>
+              <a:buChar char="•"/>
             </a:pPr>
             <a:r>
-              <a:rPr lang="ko-KR" sz="1500" dirty="0">
+              <a:rPr lang="ko-KR" sz="1450" dirty="0">
                 <a:solidFill>
                   <a:srgbClr val="F2F8FF"/>
                 </a:solidFill>
                 <a:latin typeface="Malgun Gothic"/>
-                <a:ea typeface="Malgun Gothic"/>
-              </a:rPr>
-              <a:t>?? ??/?? ??? ????</a:t>
+                <a:ea typeface="맑은 고딕"/>
+              </a:rPr>
+              <a:t>렌즈 퍼즐 종류와 시퀀스 확장 가능</a:t>
             </a:r>
           </a:p>
         </p:txBody>
@@ -1245,18 +1327,18 @@
         </p:nvSpPr>
         <p:spPr>
           <a:xfrm>
-            <a:off x="690000" y="6020000"/>
-            <a:ext cx="2500000" cy="320000"/>
+            <a:off x="690000" y="6040000"/>
+            <a:ext cx="2500000" cy="310000"/>
           </a:xfrm>
           <a:prstGeom prst="roundRect">
             <a:avLst/>
           </a:prstGeom>
           <a:solidFill>
-            <a:srgbClr val="0E2230"/>
+            <a:srgbClr val="0D2230"/>
           </a:solidFill>
           <a:ln w="19050">
             <a:solidFill>
-              <a:srgbClr val="5F7783"/>
+              <a:srgbClr val="5D7480"/>
             </a:solidFill>
           </a:ln>
         </p:spPr>
@@ -1266,14 +1348,14 @@
           <a:p>
             <a:pPr algn="ctr"/>
             <a:r>
-              <a:rPr lang="ko-KR" sz="1200" dirty="0">
+              <a:rPr lang="ko-KR" sz="1150" dirty="0">
                 <a:solidFill>
                   <a:srgbClr val="9FB4C0"/>
                 </a:solidFill>
                 <a:latin typeface="Malgun Gothic"/>
-                <a:ea typeface="Malgun Gothic"/>
-              </a:rPr>
-              <a:t>?? ?? ??: 20?</a:t>
+                <a:ea typeface="맑은 고딕"/>
+              </a:rPr>
+              <a:t>예상 발표 시간: 20초</a:t>
             </a:r>
           </a:p>
         </p:txBody>
@@ -1286,8 +1368,8 @@
         </p:nvSpPr>
         <p:spPr>
           <a:xfrm>
-            <a:off x="7700000" y="6060000"/>
-            <a:ext cx="3800000" cy="260000"/>
+            <a:off x="7600000" y="6090000"/>
+            <a:ext cx="3920000" cy="240000"/>
           </a:xfrm>
           <a:prstGeom prst="rect">
             <a:avLst/>
@@ -1303,14 +1385,14 @@
           <a:p>
             <a:pPr algn="l"/>
             <a:r>
-              <a:rPr lang="ko-KR" sz="1050" dirty="0">
-                <a:solidFill>
-                  <a:srgbClr val="5F7783"/>
-                </a:solidFill>
-                <a:latin typeface="Malgun Gothic"/>
-                <a:ea typeface="Malgun Gothic"/>
-              </a:rPr>
-              <a:t>Memory Recycler 3D | 7? ?? ?? ??</a:t>
+              <a:rPr lang="ko-KR" sz="1000" dirty="0">
+                <a:solidFill>
+                  <a:srgbClr val="5D7480"/>
+                </a:solidFill>
+                <a:latin typeface="Malgun Gothic"/>
+                <a:ea typeface="맑은 고딕"/>
+              </a:rPr>
+              <a:t>Memory Recycler 3D | 7분 최종 발표 초안</a:t>
             </a:r>
           </a:p>
         </p:txBody>
@@ -1342,7 +1424,7 @@
       </p:grpSpPr>
       <p:sp>
         <p:nvSpPr>
-          <p:cNvPr id="2" name="bg panel"/>
+          <p:cNvPr id="2" name="background"/>
           <p:cNvSpPr/>
           <p:nvPr/>
         </p:nvSpPr>
@@ -1371,29 +1453,29 @@
         <p:spPr>
           <a:xfrm>
             <a:off x="0" y="0"/>
-            <a:ext cx="12192000" cy="90000"/>
-          </a:xfrm>
-          <a:prstGeom prst="rect">
-            <a:avLst/>
-          </a:prstGeom>
-          <a:solidFill>
-            <a:srgbClr val="28D8E8"/>
-          </a:solidFill>
-          <a:ln>
-            <a:noFill/>
-          </a:ln>
-        </p:spPr>
-      </p:sp>
-      <p:sp>
-        <p:nvSpPr>
-          <p:cNvPr id="4" name="lens glow"/>
-          <p:cNvSpPr/>
-          <p:nvPr/>
-        </p:nvSpPr>
-        <p:spPr>
-          <a:xfrm>
-            <a:off x="10000000" y="250000"/>
-            <a:ext cx="1500000" cy="1500000"/>
+            <a:ext cx="12192000" cy="85000"/>
+          </a:xfrm>
+          <a:prstGeom prst="rect">
+            <a:avLst/>
+          </a:prstGeom>
+          <a:solidFill>
+            <a:srgbClr val="27D7E7"/>
+          </a:solidFill>
+          <a:ln>
+            <a:noFill/>
+          </a:ln>
+        </p:spPr>
+      </p:sp>
+      <p:sp>
+        <p:nvSpPr>
+          <p:cNvPr id="4" name="lens frame"/>
+          <p:cNvSpPr/>
+          <p:nvPr/>
+        </p:nvSpPr>
+        <p:spPr>
+          <a:xfrm>
+            <a:off x="10020000" y="260000"/>
+            <a:ext cx="1350000" cy="1350000"/>
           </a:xfrm>
           <a:prstGeom prst="roundRect">
             <a:avLst/>
@@ -1403,21 +1485,21 @@
           </a:solidFill>
           <a:ln w="19050">
             <a:solidFill>
-              <a:srgbClr val="28D8E8"/>
+              <a:srgbClr val="27D7E7"/>
             </a:solidFill>
           </a:ln>
         </p:spPr>
       </p:sp>
       <p:sp>
         <p:nvSpPr>
-          <p:cNvPr id="5" name="slide no"/>
-          <p:cNvSpPr/>
-          <p:nvPr/>
-        </p:nvSpPr>
-        <p:spPr>
-          <a:xfrm>
-            <a:off x="10800000" y="350000"/>
-            <a:ext cx="700000" cy="280000"/>
+          <p:cNvPr id="5" name="slide number"/>
+          <p:cNvSpPr/>
+          <p:nvPr/>
+        </p:nvSpPr>
+        <p:spPr>
+          <a:xfrm>
+            <a:off x="10820000" y="360000"/>
+            <a:ext cx="720000" cy="260000"/>
           </a:xfrm>
           <a:prstGeom prst="rect">
             <a:avLst/>
@@ -1433,12 +1515,12 @@
           <a:p>
             <a:pPr algn="ctr"/>
             <a:r>
-              <a:rPr lang="ko-KR" sz="1300" dirty="0">
+              <a:rPr lang="ko-KR" sz="1200" dirty="0">
                 <a:solidFill>
                   <a:srgbClr val="9FB4C0"/>
                 </a:solidFill>
                 <a:latin typeface="Malgun Gothic"/>
-                <a:ea typeface="Malgun Gothic"/>
+                <a:ea typeface="맑은 고딕"/>
               </a:rPr>
               <a:t>12/12</a:t>
             </a:r>
@@ -1470,15 +1552,15 @@
           <a:p>
             <a:pPr algn="l"/>
             <a:r>
-              <a:rPr lang="ko-KR" sz="2850" dirty="0">
+              <a:rPr lang="ko-KR" sz="2900" dirty="0">
                 <a:b/>
                 <a:solidFill>
                   <a:srgbClr val="FFFFFF"/>
                 </a:solidFill>
                 <a:latin typeface="Malgun Gothic"/>
-                <a:ea typeface="Malgun Gothic"/>
-              </a:rPr>
-              <a:t>??? / Q&amp;A</a:t>
+                <a:ea typeface="맑은 고딕"/>
+              </a:rPr>
+              <a:t>마무리 / Q&amp;A</a:t>
             </a:r>
           </a:p>
         </p:txBody>
@@ -1508,15 +1590,15 @@
           <a:p>
             <a:pPr algn="l"/>
             <a:r>
-              <a:rPr lang="ko-KR" sz="1700" dirty="0">
+              <a:rPr lang="ko-KR" sz="1650" dirty="0">
                 <a:b/>
                 <a:solidFill>
-                  <a:srgbClr val="28D8E8"/>
-                </a:solidFill>
-                <a:latin typeface="Malgun Gothic"/>
-                <a:ea typeface="Malgun Gothic"/>
-              </a:rPr>
-              <a:t>????? ???? ?? ??? ??? ????? ????</a:t>
+                  <a:srgbClr val="27D7E7"/>
+                </a:solidFill>
+                <a:latin typeface="Malgun Gothic"/>
+                <a:ea typeface="맑은 고딕"/>
+              </a:rPr>
+              <a:t>Memory Recycler 3D는 UI를 렌즈로 바꾸고 마지막에는 플레이어의 행동까지 기억하는 게임입니다.</a:t>
             </a:r>
           </a:p>
         </p:txBody>
@@ -1529,18 +1611,18 @@
         </p:nvSpPr>
         <p:spPr>
           <a:xfrm>
-            <a:off x="7050000" y="1670000"/>
-            <a:ext cx="4350000" cy="3420000"/>
+            <a:off x="7000000" y="1660000"/>
+            <a:ext cx="4380000" cy="3450000"/>
           </a:xfrm>
           <a:prstGeom prst="roundRect">
             <a:avLst/>
           </a:prstGeom>
           <a:solidFill>
-            <a:srgbClr val="0A141B"/>
+            <a:srgbClr val="08141B"/>
           </a:solidFill>
           <a:ln w="19050">
             <a:solidFill>
-              <a:srgbClr val="28D8E8"/>
+              <a:srgbClr val="27D7E7"/>
             </a:solidFill>
             <a:prstDash val="dash"/>
           </a:ln>
@@ -1551,27 +1633,27 @@
           <a:p>
             <a:pPr algn="ctr"/>
             <a:r>
-              <a:rPr lang="ko-KR" sz="1650" dirty="0">
+              <a:rPr lang="ko-KR" sz="1600" dirty="0">
                 <a:solidFill>
                   <a:srgbClr val="9FB4C0"/>
                 </a:solidFill>
                 <a:latin typeface="Malgun Gothic"/>
-                <a:ea typeface="Malgun Gothic"/>
-              </a:rPr>
-              <a:t>[???? ?? ??]</a:t>
+                <a:ea typeface="맑은 고딕"/>
+              </a:rPr>
+              <a:t>[스크린샷 삽입 예정]</a:t>
             </a:r>
           </a:p>
           <a:p>
             <a:pPr algn="ctr"/>
             <a:r>
-              <a:rPr lang="ko-KR" sz="1650" dirty="0">
+              <a:rPr lang="ko-KR" sz="1600" dirty="0">
                 <a:solidFill>
                   <a:srgbClr val="9FB4C0"/>
                 </a:solidFill>
                 <a:latin typeface="Malgun Gothic"/>
-                <a:ea typeface="Malgun Gothic"/>
-              </a:rPr>
-              <a:t>?? ?? ?? ?? ???? ???</a:t>
+                <a:ea typeface="맑은 고딕"/>
+              </a:rPr>
+              <a:t>엔딩 핵심 문장</a:t>
             </a:r>
           </a:p>
         </p:txBody>
@@ -1584,8 +1666,8 @@
         </p:nvSpPr>
         <p:spPr>
           <a:xfrm>
-            <a:off x="690000" y="1800000"/>
-            <a:ext cx="5850000" cy="3300000"/>
+            <a:off x="690000" y="1820000"/>
+            <a:ext cx="5850000" cy="3250000"/>
           </a:xfrm>
           <a:prstGeom prst="rect">
             <a:avLst/>
@@ -1600,62 +1682,62 @@
           <a:lstStyle/>
           <a:p>
             <a:pPr marL="342900" indent="-228600" algn="l">
-              <a:buChar char="?"/>
+              <a:buChar char="•"/>
             </a:pPr>
             <a:r>
-              <a:rPr lang="ko-KR" sz="1500" dirty="0">
+              <a:rPr lang="ko-KR" sz="1450" dirty="0">
                 <a:solidFill>
                   <a:srgbClr val="F2F8FF"/>
                 </a:solidFill>
                 <a:latin typeface="Malgun Gothic"/>
-                <a:ea typeface="Malgun Gothic"/>
-              </a:rPr>
-              <a:t>?? ??: UI? 3D ??? ??? ??</a:t>
+                <a:ea typeface="맑은 고딕"/>
+              </a:rPr>
+              <a:t>UI를 3D 공간과 겹치는 퍼즐로 사용</a:t>
             </a:r>
           </a:p>
           <a:p>
             <a:pPr marL="342900" indent="-228600" algn="l">
-              <a:buChar char="?"/>
+              <a:buChar char="•"/>
             </a:pPr>
             <a:r>
-              <a:rPr lang="ko-KR" sz="1500" dirty="0">
+              <a:rPr lang="ko-KR" sz="1450" dirty="0">
                 <a:solidFill>
                   <a:srgbClr val="F2F8FF"/>
                 </a:solidFill>
                 <a:latin typeface="Malgun Gothic"/>
-                <a:ea typeface="Malgun Gothic"/>
-              </a:rPr>
-              <a:t>?? ??: ??/??/???? ??</a:t>
+                <a:ea typeface="맑은 고딕"/>
+              </a:rPr>
+              <a:t>보존 / 삭제 / 재가공 선택을 엔딩에 반영</a:t>
             </a:r>
           </a:p>
           <a:p>
             <a:pPr marL="342900" indent="-228600" algn="l">
-              <a:buChar char="?"/>
+              <a:buChar char="•"/>
             </a:pPr>
             <a:r>
-              <a:rPr lang="ko-KR" sz="1500" dirty="0">
+              <a:rPr lang="ko-KR" sz="1450" dirty="0">
                 <a:solidFill>
                   <a:srgbClr val="F2F8FF"/>
                 </a:solidFill>
                 <a:latin typeface="Malgun Gothic"/>
-                <a:ea typeface="Malgun Gothic"/>
-              </a:rPr>
-              <a:t>???? ??: ????? ???? ??</a:t>
+                <a:ea typeface="맑은 고딕"/>
+              </a:rPr>
+              <a:t>PlayerMemoryLog를 통한 자기기록 심문</a:t>
             </a:r>
           </a:p>
           <a:p>
             <a:pPr marL="342900" indent="-228600" algn="l">
-              <a:buChar char="?"/>
+              <a:buChar char="•"/>
             </a:pPr>
             <a:r>
-              <a:rPr lang="ko-KR" sz="1500" dirty="0">
+              <a:rPr lang="ko-KR" sz="1450" dirty="0">
                 <a:solidFill>
                   <a:srgbClr val="F2F8FF"/>
                 </a:solidFill>
                 <a:latin typeface="Malgun Gothic"/>
-                <a:ea typeface="Malgun Gothic"/>
-              </a:rPr>
-              <a:t>??: ??? ????? ????</a:t>
+                <a:ea typeface="맑은 고딕"/>
+              </a:rPr>
+              <a:t>질문 감사합니다</a:t>
             </a:r>
           </a:p>
         </p:txBody>
@@ -1668,18 +1750,18 @@
         </p:nvSpPr>
         <p:spPr>
           <a:xfrm>
-            <a:off x="690000" y="6020000"/>
-            <a:ext cx="2500000" cy="320000"/>
+            <a:off x="690000" y="6040000"/>
+            <a:ext cx="2500000" cy="310000"/>
           </a:xfrm>
           <a:prstGeom prst="roundRect">
             <a:avLst/>
           </a:prstGeom>
           <a:solidFill>
-            <a:srgbClr val="0E2230"/>
+            <a:srgbClr val="0D2230"/>
           </a:solidFill>
           <a:ln w="19050">
             <a:solidFill>
-              <a:srgbClr val="5F7783"/>
+              <a:srgbClr val="5D7480"/>
             </a:solidFill>
           </a:ln>
         </p:spPr>
@@ -1689,14 +1771,14 @@
           <a:p>
             <a:pPr algn="ctr"/>
             <a:r>
-              <a:rPr lang="ko-KR" sz="1200" dirty="0">
+              <a:rPr lang="ko-KR" sz="1150" dirty="0">
                 <a:solidFill>
                   <a:srgbClr val="9FB4C0"/>
                 </a:solidFill>
                 <a:latin typeface="Malgun Gothic"/>
-                <a:ea typeface="Malgun Gothic"/>
-              </a:rPr>
-              <a:t>?? ?? ??: 10?</a:t>
+                <a:ea typeface="맑은 고딕"/>
+              </a:rPr>
+              <a:t>예상 발표 시간: 10초</a:t>
             </a:r>
           </a:p>
         </p:txBody>
@@ -1709,8 +1791,8 @@
         </p:nvSpPr>
         <p:spPr>
           <a:xfrm>
-            <a:off x="7700000" y="6060000"/>
-            <a:ext cx="3800000" cy="260000"/>
+            <a:off x="7600000" y="6090000"/>
+            <a:ext cx="3920000" cy="240000"/>
           </a:xfrm>
           <a:prstGeom prst="rect">
             <a:avLst/>
@@ -1726,14 +1808,14 @@
           <a:p>
             <a:pPr algn="l"/>
             <a:r>
-              <a:rPr lang="ko-KR" sz="1050" dirty="0">
-                <a:solidFill>
-                  <a:srgbClr val="5F7783"/>
-                </a:solidFill>
-                <a:latin typeface="Malgun Gothic"/>
-                <a:ea typeface="Malgun Gothic"/>
-              </a:rPr>
-              <a:t>Memory Recycler 3D | 7? ?? ?? ??</a:t>
+              <a:rPr lang="ko-KR" sz="1000" dirty="0">
+                <a:solidFill>
+                  <a:srgbClr val="5D7480"/>
+                </a:solidFill>
+                <a:latin typeface="Malgun Gothic"/>
+                <a:ea typeface="맑은 고딕"/>
+              </a:rPr>
+              <a:t>Memory Recycler 3D | 7분 최종 발표 초안</a:t>
             </a:r>
           </a:p>
         </p:txBody>
@@ -1765,7 +1847,7 @@
       </p:grpSpPr>
       <p:sp>
         <p:nvSpPr>
-          <p:cNvPr id="2" name="bg panel"/>
+          <p:cNvPr id="2" name="background"/>
           <p:cNvSpPr/>
           <p:nvPr/>
         </p:nvSpPr>
@@ -1794,29 +1876,29 @@
         <p:spPr>
           <a:xfrm>
             <a:off x="0" y="0"/>
-            <a:ext cx="12192000" cy="90000"/>
-          </a:xfrm>
-          <a:prstGeom prst="rect">
-            <a:avLst/>
-          </a:prstGeom>
-          <a:solidFill>
-            <a:srgbClr val="28D8E8"/>
-          </a:solidFill>
-          <a:ln>
-            <a:noFill/>
-          </a:ln>
-        </p:spPr>
-      </p:sp>
-      <p:sp>
-        <p:nvSpPr>
-          <p:cNvPr id="4" name="lens glow"/>
-          <p:cNvSpPr/>
-          <p:nvPr/>
-        </p:nvSpPr>
-        <p:spPr>
-          <a:xfrm>
-            <a:off x="10000000" y="250000"/>
-            <a:ext cx="1500000" cy="1500000"/>
+            <a:ext cx="12192000" cy="85000"/>
+          </a:xfrm>
+          <a:prstGeom prst="rect">
+            <a:avLst/>
+          </a:prstGeom>
+          <a:solidFill>
+            <a:srgbClr val="27D7E7"/>
+          </a:solidFill>
+          <a:ln>
+            <a:noFill/>
+          </a:ln>
+        </p:spPr>
+      </p:sp>
+      <p:sp>
+        <p:nvSpPr>
+          <p:cNvPr id="4" name="lens frame"/>
+          <p:cNvSpPr/>
+          <p:nvPr/>
+        </p:nvSpPr>
+        <p:spPr>
+          <a:xfrm>
+            <a:off x="10020000" y="260000"/>
+            <a:ext cx="1350000" cy="1350000"/>
           </a:xfrm>
           <a:prstGeom prst="roundRect">
             <a:avLst/>
@@ -1826,21 +1908,21 @@
           </a:solidFill>
           <a:ln w="19050">
             <a:solidFill>
-              <a:srgbClr val="28D8E8"/>
+              <a:srgbClr val="27D7E7"/>
             </a:solidFill>
           </a:ln>
         </p:spPr>
       </p:sp>
       <p:sp>
         <p:nvSpPr>
-          <p:cNvPr id="5" name="slide no"/>
-          <p:cNvSpPr/>
-          <p:nvPr/>
-        </p:nvSpPr>
-        <p:spPr>
-          <a:xfrm>
-            <a:off x="10800000" y="350000"/>
-            <a:ext cx="700000" cy="280000"/>
+          <p:cNvPr id="5" name="slide number"/>
+          <p:cNvSpPr/>
+          <p:nvPr/>
+        </p:nvSpPr>
+        <p:spPr>
+          <a:xfrm>
+            <a:off x="10820000" y="360000"/>
+            <a:ext cx="720000" cy="260000"/>
           </a:xfrm>
           <a:prstGeom prst="rect">
             <a:avLst/>
@@ -1856,12 +1938,12 @@
           <a:p>
             <a:pPr algn="ctr"/>
             <a:r>
-              <a:rPr lang="ko-KR" sz="1300" dirty="0">
+              <a:rPr lang="ko-KR" sz="1200" dirty="0">
                 <a:solidFill>
                   <a:srgbClr val="9FB4C0"/>
                 </a:solidFill>
                 <a:latin typeface="Malgun Gothic"/>
-                <a:ea typeface="Malgun Gothic"/>
+                <a:ea typeface="맑은 고딕"/>
               </a:rPr>
               <a:t>02/12</a:t>
             </a:r>
@@ -1893,15 +1975,15 @@
           <a:p>
             <a:pPr algn="l"/>
             <a:r>
-              <a:rPr lang="ko-KR" sz="2850" dirty="0">
+              <a:rPr lang="ko-KR" sz="2900" dirty="0">
                 <a:b/>
                 <a:solidFill>
                   <a:srgbClr val="FFFFFF"/>
                 </a:solidFill>
                 <a:latin typeface="Malgun Gothic"/>
-                <a:ea typeface="Malgun Gothic"/>
-              </a:rPr>
-              <a:t>?? ??</a:t>
+                <a:ea typeface="맑은 고딕"/>
+              </a:rPr>
+              <a:t>개발 배경</a:t>
             </a:r>
           </a:p>
         </p:txBody>
@@ -1931,15 +2013,15 @@
           <a:p>
             <a:pPr algn="l"/>
             <a:r>
-              <a:rPr lang="ko-KR" sz="1700" dirty="0">
+              <a:rPr lang="ko-KR" sz="1650" dirty="0">
                 <a:b/>
                 <a:solidFill>
-                  <a:srgbClr val="28D8E8"/>
-                </a:solidFill>
-                <a:latin typeface="Malgun Gothic"/>
-                <a:ea typeface="Malgun Gothic"/>
-              </a:rPr>
-              <a:t>?? ?? ??? 3D ?? ?? ?? ???? ??</a:t>
+                  <a:srgbClr val="27D7E7"/>
+                </a:solidFill>
+                <a:latin typeface="Malgun Gothic"/>
+                <a:ea typeface="맑은 고딕"/>
+              </a:rPr>
+              <a:t>단순한 정보창이 아니라 UI 자체가 플레이가 되는 구조를 만들고자 했습니다.</a:t>
             </a:r>
           </a:p>
         </p:txBody>
@@ -1952,18 +2034,18 @@
         </p:nvSpPr>
         <p:spPr>
           <a:xfrm>
-            <a:off x="7050000" y="1670000"/>
-            <a:ext cx="4350000" cy="3420000"/>
+            <a:off x="7000000" y="1660000"/>
+            <a:ext cx="4380000" cy="3450000"/>
           </a:xfrm>
           <a:prstGeom prst="roundRect">
             <a:avLst/>
           </a:prstGeom>
           <a:solidFill>
-            <a:srgbClr val="0A141B"/>
+            <a:srgbClr val="08141B"/>
           </a:solidFill>
           <a:ln w="19050">
             <a:solidFill>
-              <a:srgbClr val="28D8E8"/>
+              <a:srgbClr val="27D7E7"/>
             </a:solidFill>
             <a:prstDash val="dash"/>
           </a:ln>
@@ -1974,27 +2056,27 @@
           <a:p>
             <a:pPr algn="ctr"/>
             <a:r>
-              <a:rPr lang="ko-KR" sz="1650" dirty="0">
+              <a:rPr lang="ko-KR" sz="1600" dirty="0">
                 <a:solidFill>
                   <a:srgbClr val="9FB4C0"/>
                 </a:solidFill>
                 <a:latin typeface="Malgun Gothic"/>
-                <a:ea typeface="Malgun Gothic"/>
-              </a:rPr>
-              <a:t>[???? ?? ??]</a:t>
+                <a:ea typeface="맑은 고딕"/>
+              </a:rPr>
+              <a:t>[스크린샷 삽입 예정]</a:t>
             </a:r>
           </a:p>
           <a:p>
             <a:pPr algn="ctr"/>
             <a:r>
-              <a:rPr lang="ko-KR" sz="1650" dirty="0">
+              <a:rPr lang="ko-KR" sz="1600" dirty="0">
                 <a:solidFill>
                   <a:srgbClr val="9FB4C0"/>
                 </a:solidFill>
                 <a:latin typeface="Malgun Gothic"/>
-                <a:ea typeface="Malgun Gothic"/>
-              </a:rPr>
-              <a:t>??? ?? + ?? ??</a:t>
+                <a:ea typeface="맑은 고딕"/>
+              </a:rPr>
+              <a:t>폐도시 전경 + HUD</a:t>
             </a:r>
           </a:p>
         </p:txBody>
@@ -2007,8 +2089,8 @@
         </p:nvSpPr>
         <p:spPr>
           <a:xfrm>
-            <a:off x="690000" y="1800000"/>
-            <a:ext cx="5850000" cy="3300000"/>
+            <a:off x="690000" y="1820000"/>
+            <a:ext cx="5850000" cy="3250000"/>
           </a:xfrm>
           <a:prstGeom prst="rect">
             <a:avLst/>
@@ -2023,47 +2105,47 @@
           <a:lstStyle/>
           <a:p>
             <a:pPr marL="342900" indent="-228600" algn="l">
-              <a:buChar char="?"/>
+              <a:buChar char="•"/>
             </a:pPr>
             <a:r>
-              <a:rPr lang="ko-KR" sz="1500" dirty="0">
+              <a:rPr lang="ko-KR" sz="1450" dirty="0">
                 <a:solidFill>
                   <a:srgbClr val="F2F8FF"/>
                 </a:solidFill>
                 <a:latin typeface="Malgun Gothic"/>
-                <a:ea typeface="Malgun Gothic"/>
-              </a:rPr>
-              <a:t>?? ?? ?? ??? ?? ??? ??</a:t>
+                <a:ea typeface="맑은 고딕"/>
+              </a:rPr>
+              <a:t>일반적인 탐험 게임에서 UI는 정보를 보여주는 보조 장치에 가까움</a:t>
             </a:r>
           </a:p>
           <a:p>
             <a:pPr marL="342900" indent="-228600" algn="l">
-              <a:buChar char="?"/>
+              <a:buChar char="•"/>
             </a:pPr>
             <a:r>
-              <a:rPr lang="ko-KR" sz="1500" dirty="0">
+              <a:rPr lang="ko-KR" sz="1450" dirty="0">
                 <a:solidFill>
                   <a:srgbClr val="F2F8FF"/>
                 </a:solidFill>
                 <a:latin typeface="Malgun Gothic"/>
-                <a:ea typeface="Malgun Gothic"/>
-              </a:rPr>
-              <a:t>??? ?? ? ?? ?? UI? Tab ??? ?? ???? ??</a:t>
+                <a:ea typeface="맑은 고딕"/>
+              </a:rPr>
+              <a:t>이 프로젝트는 UI를 기억을 해독하는 도구로 사용</a:t>
             </a:r>
           </a:p>
           <a:p>
             <a:pPr marL="342900" indent="-228600" algn="l">
-              <a:buChar char="?"/>
+              <a:buChar char="•"/>
             </a:pPr>
             <a:r>
-              <a:rPr lang="ko-KR" sz="1500" dirty="0">
+              <a:rPr lang="ko-KR" sz="1450" dirty="0">
                 <a:solidFill>
                   <a:srgbClr val="F2F8FF"/>
                 </a:solidFill>
                 <a:latin typeface="Malgun Gothic"/>
-                <a:ea typeface="Malgun Gothic"/>
-              </a:rPr>
-              <a:t>UI ?? ??? ??? ??? ?? ??? ??</a:t>
+                <a:ea typeface="맑은 고딕"/>
+              </a:rPr>
+              <a:t>화면과 3D 공간의 겹침을 퍼즐의 핵심으로 설계</a:t>
             </a:r>
           </a:p>
         </p:txBody>
@@ -2076,18 +2158,18 @@
         </p:nvSpPr>
         <p:spPr>
           <a:xfrm>
-            <a:off x="690000" y="6020000"/>
-            <a:ext cx="2500000" cy="320000"/>
+            <a:off x="690000" y="6040000"/>
+            <a:ext cx="2500000" cy="310000"/>
           </a:xfrm>
           <a:prstGeom prst="roundRect">
             <a:avLst/>
           </a:prstGeom>
           <a:solidFill>
-            <a:srgbClr val="0E2230"/>
+            <a:srgbClr val="0D2230"/>
           </a:solidFill>
           <a:ln w="19050">
             <a:solidFill>
-              <a:srgbClr val="5F7783"/>
+              <a:srgbClr val="5D7480"/>
             </a:solidFill>
           </a:ln>
         </p:spPr>
@@ -2097,14 +2179,14 @@
           <a:p>
             <a:pPr algn="ctr"/>
             <a:r>
-              <a:rPr lang="ko-KR" sz="1200" dirty="0">
+              <a:rPr lang="ko-KR" sz="1150" dirty="0">
                 <a:solidFill>
                   <a:srgbClr val="9FB4C0"/>
                 </a:solidFill>
                 <a:latin typeface="Malgun Gothic"/>
-                <a:ea typeface="Malgun Gothic"/>
-              </a:rPr>
-              <a:t>?? ?? ??: 20?</a:t>
+                <a:ea typeface="맑은 고딕"/>
+              </a:rPr>
+              <a:t>예상 발표 시간: 20초</a:t>
             </a:r>
           </a:p>
         </p:txBody>
@@ -2117,8 +2199,8 @@
         </p:nvSpPr>
         <p:spPr>
           <a:xfrm>
-            <a:off x="7700000" y="6060000"/>
-            <a:ext cx="3800000" cy="260000"/>
+            <a:off x="7600000" y="6090000"/>
+            <a:ext cx="3920000" cy="240000"/>
           </a:xfrm>
           <a:prstGeom prst="rect">
             <a:avLst/>
@@ -2134,14 +2216,14 @@
           <a:p>
             <a:pPr algn="l"/>
             <a:r>
-              <a:rPr lang="ko-KR" sz="1050" dirty="0">
-                <a:solidFill>
-                  <a:srgbClr val="5F7783"/>
-                </a:solidFill>
-                <a:latin typeface="Malgun Gothic"/>
-                <a:ea typeface="Malgun Gothic"/>
-              </a:rPr>
-              <a:t>Memory Recycler 3D | 7? ?? ?? ??</a:t>
+              <a:rPr lang="ko-KR" sz="1000" dirty="0">
+                <a:solidFill>
+                  <a:srgbClr val="5D7480"/>
+                </a:solidFill>
+                <a:latin typeface="Malgun Gothic"/>
+                <a:ea typeface="맑은 고딕"/>
+              </a:rPr>
+              <a:t>Memory Recycler 3D | 7분 최종 발표 초안</a:t>
             </a:r>
           </a:p>
         </p:txBody>
@@ -2173,7 +2255,7 @@
       </p:grpSpPr>
       <p:sp>
         <p:nvSpPr>
-          <p:cNvPr id="2" name="bg panel"/>
+          <p:cNvPr id="2" name="background"/>
           <p:cNvSpPr/>
           <p:nvPr/>
         </p:nvSpPr>
@@ -2202,29 +2284,29 @@
         <p:spPr>
           <a:xfrm>
             <a:off x="0" y="0"/>
-            <a:ext cx="12192000" cy="90000"/>
-          </a:xfrm>
-          <a:prstGeom prst="rect">
-            <a:avLst/>
-          </a:prstGeom>
-          <a:solidFill>
-            <a:srgbClr val="28D8E8"/>
-          </a:solidFill>
-          <a:ln>
-            <a:noFill/>
-          </a:ln>
-        </p:spPr>
-      </p:sp>
-      <p:sp>
-        <p:nvSpPr>
-          <p:cNvPr id="4" name="lens glow"/>
-          <p:cNvSpPr/>
-          <p:nvPr/>
-        </p:nvSpPr>
-        <p:spPr>
-          <a:xfrm>
-            <a:off x="10000000" y="250000"/>
-            <a:ext cx="1500000" cy="1500000"/>
+            <a:ext cx="12192000" cy="85000"/>
+          </a:xfrm>
+          <a:prstGeom prst="rect">
+            <a:avLst/>
+          </a:prstGeom>
+          <a:solidFill>
+            <a:srgbClr val="27D7E7"/>
+          </a:solidFill>
+          <a:ln>
+            <a:noFill/>
+          </a:ln>
+        </p:spPr>
+      </p:sp>
+      <p:sp>
+        <p:nvSpPr>
+          <p:cNvPr id="4" name="lens frame"/>
+          <p:cNvSpPr/>
+          <p:nvPr/>
+        </p:nvSpPr>
+        <p:spPr>
+          <a:xfrm>
+            <a:off x="10020000" y="260000"/>
+            <a:ext cx="1350000" cy="1350000"/>
           </a:xfrm>
           <a:prstGeom prst="roundRect">
             <a:avLst/>
@@ -2234,21 +2316,21 @@
           </a:solidFill>
           <a:ln w="19050">
             <a:solidFill>
-              <a:srgbClr val="28D8E8"/>
+              <a:srgbClr val="27D7E7"/>
             </a:solidFill>
           </a:ln>
         </p:spPr>
       </p:sp>
       <p:sp>
         <p:nvSpPr>
-          <p:cNvPr id="5" name="slide no"/>
-          <p:cNvSpPr/>
-          <p:nvPr/>
-        </p:nvSpPr>
-        <p:spPr>
-          <a:xfrm>
-            <a:off x="10800000" y="350000"/>
-            <a:ext cx="700000" cy="280000"/>
+          <p:cNvPr id="5" name="slide number"/>
+          <p:cNvSpPr/>
+          <p:nvPr/>
+        </p:nvSpPr>
+        <p:spPr>
+          <a:xfrm>
+            <a:off x="10820000" y="360000"/>
+            <a:ext cx="720000" cy="260000"/>
           </a:xfrm>
           <a:prstGeom prst="rect">
             <a:avLst/>
@@ -2264,12 +2346,12 @@
           <a:p>
             <a:pPr algn="ctr"/>
             <a:r>
-              <a:rPr lang="ko-KR" sz="1300" dirty="0">
+              <a:rPr lang="ko-KR" sz="1200" dirty="0">
                 <a:solidFill>
                   <a:srgbClr val="9FB4C0"/>
                 </a:solidFill>
                 <a:latin typeface="Malgun Gothic"/>
-                <a:ea typeface="Malgun Gothic"/>
+                <a:ea typeface="맑은 고딕"/>
               </a:rPr>
               <a:t>03/12</a:t>
             </a:r>
@@ -2301,15 +2383,15 @@
           <a:p>
             <a:pPr algn="l"/>
             <a:r>
-              <a:rPr lang="ko-KR" sz="2850" dirty="0">
+              <a:rPr lang="ko-KR" sz="2900" dirty="0">
                 <a:b/>
                 <a:solidFill>
                   <a:srgbClr val="FFFFFF"/>
                 </a:solidFill>
                 <a:latin typeface="Malgun Gothic"/>
-                <a:ea typeface="Malgun Gothic"/>
-              </a:rPr>
-              <a:t>?? ???</a:t>
+                <a:ea typeface="맑은 고딕"/>
+              </a:rPr>
+              <a:t>게임 콘셉트</a:t>
             </a:r>
           </a:p>
         </p:txBody>
@@ -2339,15 +2421,15 @@
           <a:p>
             <a:pPr algn="l"/>
             <a:r>
-              <a:rPr lang="ko-KR" sz="1700" dirty="0">
+              <a:rPr lang="ko-KR" sz="1650" dirty="0">
                 <a:b/>
                 <a:solidFill>
-                  <a:srgbClr val="28D8E8"/>
-                </a:solidFill>
-                <a:latin typeface="Malgun Gothic"/>
-                <a:ea typeface="Malgun Gothic"/>
-              </a:rPr>
-              <a:t>??? ????, ????? ????</a:t>
+                  <a:srgbClr val="27D7E7"/>
+                </a:solidFill>
+                <a:latin typeface="Malgun Gothic"/>
+                <a:ea typeface="맑은 고딕"/>
+              </a:rPr>
+              <a:t>플레이어는 폐도시의 기억을 수거하고 복원하는 수거원입니다.</a:t>
             </a:r>
           </a:p>
         </p:txBody>
@@ -2360,18 +2442,18 @@
         </p:nvSpPr>
         <p:spPr>
           <a:xfrm>
-            <a:off x="7050000" y="1670000"/>
-            <a:ext cx="4350000" cy="3420000"/>
+            <a:off x="7000000" y="1660000"/>
+            <a:ext cx="4380000" cy="3450000"/>
           </a:xfrm>
           <a:prstGeom prst="roundRect">
             <a:avLst/>
           </a:prstGeom>
           <a:solidFill>
-            <a:srgbClr val="0A141B"/>
+            <a:srgbClr val="08141B"/>
           </a:solidFill>
           <a:ln w="19050">
             <a:solidFill>
-              <a:srgbClr val="28D8E8"/>
+              <a:srgbClr val="27D7E7"/>
             </a:solidFill>
             <a:prstDash val="dash"/>
           </a:ln>
@@ -2382,27 +2464,27 @@
           <a:p>
             <a:pPr algn="ctr"/>
             <a:r>
-              <a:rPr lang="ko-KR" sz="1650" dirty="0">
+              <a:rPr lang="ko-KR" sz="1600" dirty="0">
                 <a:solidFill>
                   <a:srgbClr val="9FB4C0"/>
                 </a:solidFill>
                 <a:latin typeface="Malgun Gothic"/>
-                <a:ea typeface="Malgun Gothic"/>
-              </a:rPr>
-              <a:t>[???? ?? ??]</a:t>
+                <a:ea typeface="맑은 고딕"/>
+              </a:rPr>
+              <a:t>[스크린샷 삽입 예정]</a:t>
             </a:r>
           </a:p>
           <a:p>
             <a:pPr algn="ctr"/>
             <a:r>
-              <a:rPr lang="ko-KR" sz="1650" dirty="0">
+              <a:rPr lang="ko-KR" sz="1600" dirty="0">
                 <a:solidFill>
                   <a:srgbClr val="9FB4C0"/>
                 </a:solidFill>
                 <a:latin typeface="Malgun Gothic"/>
-                <a:ea typeface="Malgun Gothic"/>
-              </a:rPr>
-              <a:t>?? ?? ?? ?? ?? ?? ???? ??</a:t>
+                <a:ea typeface="맑은 고딕"/>
+              </a:rPr>
+              <a:t>기억 구체 회수 장면</a:t>
             </a:r>
           </a:p>
         </p:txBody>
@@ -2415,8 +2497,8 @@
         </p:nvSpPr>
         <p:spPr>
           <a:xfrm>
-            <a:off x="690000" y="1800000"/>
-            <a:ext cx="5850000" cy="3300000"/>
+            <a:off x="690000" y="1820000"/>
+            <a:ext cx="5850000" cy="3250000"/>
           </a:xfrm>
           <a:prstGeom prst="rect">
             <a:avLst/>
@@ -2431,47 +2513,62 @@
           <a:lstStyle/>
           <a:p>
             <a:pPr marL="342900" indent="-228600" algn="l">
-              <a:buChar char="?"/>
+              <a:buChar char="•"/>
             </a:pPr>
             <a:r>
-              <a:rPr lang="ko-KR" sz="1500" dirty="0">
+              <a:rPr lang="ko-KR" sz="1450" dirty="0">
                 <a:solidFill>
                   <a:srgbClr val="F2F8FF"/>
                 </a:solidFill>
                 <a:latin typeface="Malgun Gothic"/>
-                <a:ea typeface="Malgun Gothic"/>
-              </a:rPr>
-              <a:t>????? ???? ??? ???? ???</a:t>
+                <a:ea typeface="맑은 고딕"/>
+              </a:rPr>
+              <a:t>기억 구체를 찾아 회수</a:t>
             </a:r>
           </a:p>
           <a:p>
             <a:pPr marL="342900" indent="-228600" algn="l">
-              <a:buChar char="?"/>
+              <a:buChar char="•"/>
             </a:pPr>
             <a:r>
-              <a:rPr lang="ko-KR" sz="1500" dirty="0">
+              <a:rPr lang="ko-KR" sz="1450" dirty="0">
                 <a:solidFill>
                   <a:srgbClr val="F2F8FF"/>
                 </a:solidFill>
                 <a:latin typeface="Malgun Gothic"/>
-                <a:ea typeface="Malgun Gothic"/>
-              </a:rPr>
-              <a:t>??? ??? ? ??/??/??? ? ??? ??</a:t>
+                <a:ea typeface="맑은 고딕"/>
+              </a:rPr>
+              <a:t>기억 문장을 복원</a:t>
             </a:r>
           </a:p>
           <a:p>
             <a:pPr marL="342900" indent="-228600" algn="l">
-              <a:buChar char="?"/>
+              <a:buChar char="•"/>
             </a:pPr>
             <a:r>
-              <a:rPr lang="ko-KR" sz="1500" dirty="0">
+              <a:rPr lang="ko-KR" sz="1450" dirty="0">
                 <a:solidFill>
                   <a:srgbClr val="F2F8FF"/>
                 </a:solidFill>
                 <a:latin typeface="Malgun Gothic"/>
-                <a:ea typeface="Malgun Gothic"/>
-              </a:rPr>
-              <a:t>???? ????? ????? ??? ???? ??</a:t>
+                <a:ea typeface="맑은 고딕"/>
+              </a:rPr>
+              <a:t>보존 / 삭제 / 재가공 중 하나를 선택</a:t>
+            </a:r>
+          </a:p>
+          <a:p>
+            <a:pPr marL="342900" indent="-228600" algn="l">
+              <a:buChar char="•"/>
+            </a:pPr>
+            <a:r>
+              <a:rPr lang="ko-KR" sz="1450" dirty="0">
+                <a:solidFill>
+                  <a:srgbClr val="F2F8FF"/>
+                </a:solidFill>
+                <a:latin typeface="Malgun Gothic"/>
+                <a:ea typeface="맑은 고딕"/>
+              </a:rPr>
+              <a:t>처리한 기억은 중앙 아카이브 엔딩에 반영</a:t>
             </a:r>
           </a:p>
         </p:txBody>
@@ -2484,18 +2581,18 @@
         </p:nvSpPr>
         <p:spPr>
           <a:xfrm>
-            <a:off x="690000" y="6020000"/>
-            <a:ext cx="2500000" cy="320000"/>
+            <a:off x="690000" y="6040000"/>
+            <a:ext cx="2500000" cy="310000"/>
           </a:xfrm>
           <a:prstGeom prst="roundRect">
             <a:avLst/>
           </a:prstGeom>
           <a:solidFill>
-            <a:srgbClr val="0E2230"/>
+            <a:srgbClr val="0D2230"/>
           </a:solidFill>
           <a:ln w="19050">
             <a:solidFill>
-              <a:srgbClr val="5F7783"/>
+              <a:srgbClr val="5D7480"/>
             </a:solidFill>
           </a:ln>
         </p:spPr>
@@ -2505,14 +2602,14 @@
           <a:p>
             <a:pPr algn="ctr"/>
             <a:r>
-              <a:rPr lang="ko-KR" sz="1200" dirty="0">
+              <a:rPr lang="ko-KR" sz="1150" dirty="0">
                 <a:solidFill>
                   <a:srgbClr val="9FB4C0"/>
                 </a:solidFill>
                 <a:latin typeface="Malgun Gothic"/>
-                <a:ea typeface="Malgun Gothic"/>
-              </a:rPr>
-              <a:t>?? ?? ??: 20?</a:t>
+                <a:ea typeface="맑은 고딕"/>
+              </a:rPr>
+              <a:t>예상 발표 시간: 20초</a:t>
             </a:r>
           </a:p>
         </p:txBody>
@@ -2525,8 +2622,8 @@
         </p:nvSpPr>
         <p:spPr>
           <a:xfrm>
-            <a:off x="7700000" y="6060000"/>
-            <a:ext cx="3800000" cy="260000"/>
+            <a:off x="7600000" y="6090000"/>
+            <a:ext cx="3920000" cy="240000"/>
           </a:xfrm>
           <a:prstGeom prst="rect">
             <a:avLst/>
@@ -2542,14 +2639,14 @@
           <a:p>
             <a:pPr algn="l"/>
             <a:r>
-              <a:rPr lang="ko-KR" sz="1050" dirty="0">
-                <a:solidFill>
-                  <a:srgbClr val="5F7783"/>
-                </a:solidFill>
-                <a:latin typeface="Malgun Gothic"/>
-                <a:ea typeface="Malgun Gothic"/>
-              </a:rPr>
-              <a:t>Memory Recycler 3D | 7? ?? ?? ??</a:t>
+              <a:rPr lang="ko-KR" sz="1000" dirty="0">
+                <a:solidFill>
+                  <a:srgbClr val="5D7480"/>
+                </a:solidFill>
+                <a:latin typeface="Malgun Gothic"/>
+                <a:ea typeface="맑은 고딕"/>
+              </a:rPr>
+              <a:t>Memory Recycler 3D | 7분 최종 발표 초안</a:t>
             </a:r>
           </a:p>
         </p:txBody>
@@ -2581,7 +2678,7 @@
       </p:grpSpPr>
       <p:sp>
         <p:nvSpPr>
-          <p:cNvPr id="2" name="bg panel"/>
+          <p:cNvPr id="2" name="background"/>
           <p:cNvSpPr/>
           <p:nvPr/>
         </p:nvSpPr>
@@ -2610,29 +2707,29 @@
         <p:spPr>
           <a:xfrm>
             <a:off x="0" y="0"/>
-            <a:ext cx="12192000" cy="90000"/>
-          </a:xfrm>
-          <a:prstGeom prst="rect">
-            <a:avLst/>
-          </a:prstGeom>
-          <a:solidFill>
-            <a:srgbClr val="28D8E8"/>
-          </a:solidFill>
-          <a:ln>
-            <a:noFill/>
-          </a:ln>
-        </p:spPr>
-      </p:sp>
-      <p:sp>
-        <p:nvSpPr>
-          <p:cNvPr id="4" name="lens glow"/>
-          <p:cNvSpPr/>
-          <p:nvPr/>
-        </p:nvSpPr>
-        <p:spPr>
-          <a:xfrm>
-            <a:off x="10000000" y="250000"/>
-            <a:ext cx="1500000" cy="1500000"/>
+            <a:ext cx="12192000" cy="85000"/>
+          </a:xfrm>
+          <a:prstGeom prst="rect">
+            <a:avLst/>
+          </a:prstGeom>
+          <a:solidFill>
+            <a:srgbClr val="27D7E7"/>
+          </a:solidFill>
+          <a:ln>
+            <a:noFill/>
+          </a:ln>
+        </p:spPr>
+      </p:sp>
+      <p:sp>
+        <p:nvSpPr>
+          <p:cNvPr id="4" name="lens frame"/>
+          <p:cNvSpPr/>
+          <p:nvPr/>
+        </p:nvSpPr>
+        <p:spPr>
+          <a:xfrm>
+            <a:off x="10020000" y="260000"/>
+            <a:ext cx="1350000" cy="1350000"/>
           </a:xfrm>
           <a:prstGeom prst="roundRect">
             <a:avLst/>
@@ -2642,21 +2739,21 @@
           </a:solidFill>
           <a:ln w="19050">
             <a:solidFill>
-              <a:srgbClr val="28D8E8"/>
+              <a:srgbClr val="27D7E7"/>
             </a:solidFill>
           </a:ln>
         </p:spPr>
       </p:sp>
       <p:sp>
         <p:nvSpPr>
-          <p:cNvPr id="5" name="slide no"/>
-          <p:cNvSpPr/>
-          <p:nvPr/>
-        </p:nvSpPr>
-        <p:spPr>
-          <a:xfrm>
-            <a:off x="10800000" y="350000"/>
-            <a:ext cx="700000" cy="280000"/>
+          <p:cNvPr id="5" name="slide number"/>
+          <p:cNvSpPr/>
+          <p:nvPr/>
+        </p:nvSpPr>
+        <p:spPr>
+          <a:xfrm>
+            <a:off x="10820000" y="360000"/>
+            <a:ext cx="720000" cy="260000"/>
           </a:xfrm>
           <a:prstGeom prst="rect">
             <a:avLst/>
@@ -2672,12 +2769,12 @@
           <a:p>
             <a:pPr algn="ctr"/>
             <a:r>
-              <a:rPr lang="ko-KR" sz="1300" dirty="0">
+              <a:rPr lang="ko-KR" sz="1200" dirty="0">
                 <a:solidFill>
                   <a:srgbClr val="9FB4C0"/>
                 </a:solidFill>
                 <a:latin typeface="Malgun Gothic"/>
-                <a:ea typeface="Malgun Gothic"/>
+                <a:ea typeface="맑은 고딕"/>
               </a:rPr>
               <a:t>04/12</a:t>
             </a:r>
@@ -2709,15 +2806,15 @@
           <a:p>
             <a:pPr algn="l"/>
             <a:r>
-              <a:rPr lang="ko-KR" sz="2850" dirty="0">
+              <a:rPr lang="ko-KR" sz="2900" dirty="0">
                 <a:b/>
                 <a:solidFill>
                   <a:srgbClr val="FFFFFF"/>
                 </a:solidFill>
                 <a:latin typeface="Malgun Gothic"/>
-                <a:ea typeface="Malgun Gothic"/>
-              </a:rPr>
-              <a:t>?? ????: ?? ??</a:t>
+                <a:ea typeface="맑은 고딕"/>
+              </a:rPr>
+              <a:t>핵심 아이디어: 기억 렌즈</a:t>
             </a:r>
           </a:p>
         </p:txBody>
@@ -2747,15 +2844,15 @@
           <a:p>
             <a:pPr algn="l"/>
             <a:r>
-              <a:rPr lang="ko-KR" sz="1700" dirty="0">
+              <a:rPr lang="ko-KR" sz="1650" dirty="0">
                 <a:b/>
                 <a:solidFill>
-                  <a:srgbClr val="28D8E8"/>
-                </a:solidFill>
-                <a:latin typeface="Malgun Gothic"/>
-                <a:ea typeface="Malgun Gothic"/>
-              </a:rPr>
-              <a:t>Tab ???? ??? ??? ??? ?? ???</a:t>
+                  <a:srgbClr val="27D7E7"/>
+                </a:solidFill>
+                <a:latin typeface="Malgun Gothic"/>
+                <a:ea typeface="맑은 고딕"/>
+              </a:rPr>
+              <a:t>Tab은 메뉴가 아니라 현실 위에 기록을 겹쳐 보는 기억 렌즈입니다.</a:t>
             </a:r>
           </a:p>
         </p:txBody>
@@ -2768,18 +2865,18 @@
         </p:nvSpPr>
         <p:spPr>
           <a:xfrm>
-            <a:off x="7050000" y="1670000"/>
-            <a:ext cx="4350000" cy="3420000"/>
+            <a:off x="7000000" y="1660000"/>
+            <a:ext cx="4380000" cy="3450000"/>
           </a:xfrm>
           <a:prstGeom prst="roundRect">
             <a:avLst/>
           </a:prstGeom>
           <a:solidFill>
-            <a:srgbClr val="0A141B"/>
+            <a:srgbClr val="08141B"/>
           </a:solidFill>
           <a:ln w="19050">
             <a:solidFill>
-              <a:srgbClr val="28D8E8"/>
+              <a:srgbClr val="27D7E7"/>
             </a:solidFill>
             <a:prstDash val="dash"/>
           </a:ln>
@@ -2790,27 +2887,27 @@
           <a:p>
             <a:pPr algn="ctr"/>
             <a:r>
-              <a:rPr lang="ko-KR" sz="1650" dirty="0">
+              <a:rPr lang="ko-KR" sz="1600" dirty="0">
                 <a:solidFill>
                   <a:srgbClr val="9FB4C0"/>
                 </a:solidFill>
                 <a:latin typeface="Malgun Gothic"/>
-                <a:ea typeface="Malgun Gothic"/>
-              </a:rPr>
-              <a:t>[???? ?? ??]</a:t>
+                <a:ea typeface="맑은 고딕"/>
+              </a:rPr>
+              <a:t>[스크린샷 삽입 예정]</a:t>
             </a:r>
           </a:p>
           <a:p>
             <a:pPr algn="ctr"/>
             <a:r>
-              <a:rPr lang="ko-KR" sz="1650" dirty="0">
+              <a:rPr lang="ko-KR" sz="1600" dirty="0">
                 <a:solidFill>
                   <a:srgbClr val="9FB4C0"/>
                 </a:solidFill>
                 <a:latin typeface="Malgun Gothic"/>
-                <a:ea typeface="Malgun Gothic"/>
-              </a:rPr>
-              <a:t>Tab ?? OFF/ON ??</a:t>
+                <a:ea typeface="맑은 고딕"/>
+              </a:rPr>
+              <a:t>Tab 기억 렌즈 ON/OFF 비교</a:t>
             </a:r>
           </a:p>
         </p:txBody>
@@ -2823,8 +2920,8 @@
         </p:nvSpPr>
         <p:spPr>
           <a:xfrm>
-            <a:off x="690000" y="1800000"/>
-            <a:ext cx="5850000" cy="3300000"/>
+            <a:off x="690000" y="1820000"/>
+            <a:ext cx="5850000" cy="3250000"/>
           </a:xfrm>
           <a:prstGeom prst="rect">
             <a:avLst/>
@@ -2839,62 +2936,62 @@
           <a:lstStyle/>
           <a:p>
             <a:pPr marL="342900" indent="-228600" algn="l">
-              <a:buChar char="?"/>
+              <a:buChar char="•"/>
             </a:pPr>
             <a:r>
-              <a:rPr lang="ko-KR" sz="1500" dirty="0">
+              <a:rPr lang="ko-KR" sz="1450" dirty="0">
                 <a:solidFill>
                   <a:srgbClr val="F2F8FF"/>
                 </a:solidFill>
                 <a:latin typeface="Malgun Gothic"/>
-                <a:ea typeface="Malgun Gothic"/>
-              </a:rPr>
-              <a:t>Tab = ?? ?? ON/OFF</a:t>
+                <a:ea typeface="맑은 고딕"/>
+              </a:rPr>
+              <a:t>Tab 입력으로 기억 렌즈 ON/OFF</a:t>
             </a:r>
           </a:p>
           <a:p>
             <a:pPr marL="342900" indent="-228600" algn="l">
-              <a:buChar char="?"/>
+              <a:buChar char="•"/>
             </a:pPr>
             <a:r>
-              <a:rPr lang="ko-KR" sz="1500" dirty="0">
+              <a:rPr lang="ko-KR" sz="1450" dirty="0">
                 <a:solidFill>
                   <a:srgbClr val="F2F8FF"/>
                 </a:solidFill>
                 <a:latin typeface="Malgun Gothic"/>
-                <a:ea typeface="Malgun Gothic"/>
-              </a:rPr>
-              <a:t>World Space Canvas ?? ?? UI</a:t>
+                <a:ea typeface="맑은 고딕"/>
+              </a:rPr>
+              <a:t>World Space UI가 기억의 잔상처럼 표시</a:t>
             </a:r>
           </a:p>
           <a:p>
             <a:pPr marL="342900" indent="-228600" algn="l">
-              <a:buChar char="?"/>
+              <a:buChar char="•"/>
             </a:pPr>
             <a:r>
-              <a:rPr lang="ko-KR" sz="1500" dirty="0">
+              <a:rPr lang="ko-KR" sz="1450" dirty="0">
                 <a:solidFill>
                   <a:srgbClr val="F2F8FF"/>
                 </a:solidFill>
                 <a:latin typeface="Malgun Gothic"/>
-                <a:ea typeface="Malgun Gothic"/>
-              </a:rPr>
-              <a:t>???? ???? billboard UI</a:t>
+                <a:ea typeface="맑은 고딕"/>
+              </a:rPr>
+              <a:t>UI와 3D 공간을 겹쳐 기억을 복원</a:t>
             </a:r>
           </a:p>
           <a:p>
             <a:pPr marL="342900" indent="-228600" algn="l">
-              <a:buChar char="?"/>
+              <a:buChar char="•"/>
             </a:pPr>
             <a:r>
-              <a:rPr lang="ko-KR" sz="1500" dirty="0">
+              <a:rPr lang="ko-KR" sz="1450" dirty="0">
                 <a:solidFill>
                   <a:srgbClr val="F2F8FF"/>
                 </a:solidFill>
                 <a:latin typeface="Malgun Gothic"/>
-                <a:ea typeface="Malgun Gothic"/>
-              </a:rPr>
-              <a:t>?? ?? ??? ?? ??? ?? ??</a:t>
+                <a:ea typeface="맑은 고딕"/>
+              </a:rPr>
+              <a:t>기록창을 플레이 메커니즘으로 전환</a:t>
             </a:r>
           </a:p>
         </p:txBody>
@@ -2907,18 +3004,18 @@
         </p:nvSpPr>
         <p:spPr>
           <a:xfrm>
-            <a:off x="690000" y="6020000"/>
-            <a:ext cx="2500000" cy="320000"/>
+            <a:off x="690000" y="6040000"/>
+            <a:ext cx="2500000" cy="310000"/>
           </a:xfrm>
           <a:prstGeom prst="roundRect">
             <a:avLst/>
           </a:prstGeom>
           <a:solidFill>
-            <a:srgbClr val="0E2230"/>
+            <a:srgbClr val="0D2230"/>
           </a:solidFill>
           <a:ln w="19050">
             <a:solidFill>
-              <a:srgbClr val="5F7783"/>
+              <a:srgbClr val="5D7480"/>
             </a:solidFill>
           </a:ln>
         </p:spPr>
@@ -2928,14 +3025,14 @@
           <a:p>
             <a:pPr algn="ctr"/>
             <a:r>
-              <a:rPr lang="ko-KR" sz="1200" dirty="0">
+              <a:rPr lang="ko-KR" sz="1150" dirty="0">
                 <a:solidFill>
                   <a:srgbClr val="9FB4C0"/>
                 </a:solidFill>
                 <a:latin typeface="Malgun Gothic"/>
-                <a:ea typeface="Malgun Gothic"/>
-              </a:rPr>
-              <a:t>?? ?? ??: 35?</a:t>
+                <a:ea typeface="맑은 고딕"/>
+              </a:rPr>
+              <a:t>예상 발표 시간: 35초</a:t>
             </a:r>
           </a:p>
         </p:txBody>
@@ -2948,8 +3045,8 @@
         </p:nvSpPr>
         <p:spPr>
           <a:xfrm>
-            <a:off x="7700000" y="6060000"/>
-            <a:ext cx="3800000" cy="260000"/>
+            <a:off x="7600000" y="6090000"/>
+            <a:ext cx="3920000" cy="240000"/>
           </a:xfrm>
           <a:prstGeom prst="rect">
             <a:avLst/>
@@ -2965,14 +3062,14 @@
           <a:p>
             <a:pPr algn="l"/>
             <a:r>
-              <a:rPr lang="ko-KR" sz="1050" dirty="0">
-                <a:solidFill>
-                  <a:srgbClr val="5F7783"/>
-                </a:solidFill>
-                <a:latin typeface="Malgun Gothic"/>
-                <a:ea typeface="Malgun Gothic"/>
-              </a:rPr>
-              <a:t>Memory Recycler 3D | 7? ?? ?? ??</a:t>
+              <a:rPr lang="ko-KR" sz="1000" dirty="0">
+                <a:solidFill>
+                  <a:srgbClr val="5D7480"/>
+                </a:solidFill>
+                <a:latin typeface="Malgun Gothic"/>
+                <a:ea typeface="맑은 고딕"/>
+              </a:rPr>
+              <a:t>Memory Recycler 3D | 7분 최종 발표 초안</a:t>
             </a:r>
           </a:p>
         </p:txBody>
@@ -3004,7 +3101,7 @@
       </p:grpSpPr>
       <p:sp>
         <p:nvSpPr>
-          <p:cNvPr id="2" name="bg panel"/>
+          <p:cNvPr id="2" name="background"/>
           <p:cNvSpPr/>
           <p:nvPr/>
         </p:nvSpPr>
@@ -3033,29 +3130,29 @@
         <p:spPr>
           <a:xfrm>
             <a:off x="0" y="0"/>
-            <a:ext cx="12192000" cy="90000"/>
-          </a:xfrm>
-          <a:prstGeom prst="rect">
-            <a:avLst/>
-          </a:prstGeom>
-          <a:solidFill>
-            <a:srgbClr val="28D8E8"/>
-          </a:solidFill>
-          <a:ln>
-            <a:noFill/>
-          </a:ln>
-        </p:spPr>
-      </p:sp>
-      <p:sp>
-        <p:nvSpPr>
-          <p:cNvPr id="4" name="lens glow"/>
-          <p:cNvSpPr/>
-          <p:nvPr/>
-        </p:nvSpPr>
-        <p:spPr>
-          <a:xfrm>
-            <a:off x="10000000" y="250000"/>
-            <a:ext cx="1500000" cy="1500000"/>
+            <a:ext cx="12192000" cy="85000"/>
+          </a:xfrm>
+          <a:prstGeom prst="rect">
+            <a:avLst/>
+          </a:prstGeom>
+          <a:solidFill>
+            <a:srgbClr val="27D7E7"/>
+          </a:solidFill>
+          <a:ln>
+            <a:noFill/>
+          </a:ln>
+        </p:spPr>
+      </p:sp>
+      <p:sp>
+        <p:nvSpPr>
+          <p:cNvPr id="4" name="lens frame"/>
+          <p:cNvSpPr/>
+          <p:nvPr/>
+        </p:nvSpPr>
+        <p:spPr>
+          <a:xfrm>
+            <a:off x="10020000" y="260000"/>
+            <a:ext cx="1350000" cy="1350000"/>
           </a:xfrm>
           <a:prstGeom prst="roundRect">
             <a:avLst/>
@@ -3065,21 +3162,21 @@
           </a:solidFill>
           <a:ln w="19050">
             <a:solidFill>
-              <a:srgbClr val="28D8E8"/>
+              <a:srgbClr val="27D7E7"/>
             </a:solidFill>
           </a:ln>
         </p:spPr>
       </p:sp>
       <p:sp>
         <p:nvSpPr>
-          <p:cNvPr id="5" name="slide no"/>
-          <p:cNvSpPr/>
-          <p:nvPr/>
-        </p:nvSpPr>
-        <p:spPr>
-          <a:xfrm>
-            <a:off x="10800000" y="350000"/>
-            <a:ext cx="700000" cy="280000"/>
+          <p:cNvPr id="5" name="slide number"/>
+          <p:cNvSpPr/>
+          <p:nvPr/>
+        </p:nvSpPr>
+        <p:spPr>
+          <a:xfrm>
+            <a:off x="10820000" y="360000"/>
+            <a:ext cx="720000" cy="260000"/>
           </a:xfrm>
           <a:prstGeom prst="rect">
             <a:avLst/>
@@ -3095,12 +3192,12 @@
           <a:p>
             <a:pPr algn="ctr"/>
             <a:r>
-              <a:rPr lang="ko-KR" sz="1300" dirty="0">
+              <a:rPr lang="ko-KR" sz="1200" dirty="0">
                 <a:solidFill>
                   <a:srgbClr val="9FB4C0"/>
                 </a:solidFill>
                 <a:latin typeface="Malgun Gothic"/>
-                <a:ea typeface="Malgun Gothic"/>
+                <a:ea typeface="맑은 고딕"/>
               </a:rPr>
               <a:t>05/12</a:t>
             </a:r>
@@ -3132,15 +3229,15 @@
           <a:p>
             <a:pPr algn="l"/>
             <a:r>
-              <a:rPr lang="ko-KR" sz="2850" dirty="0">
+              <a:rPr lang="ko-KR" sz="2900" dirty="0">
                 <a:b/>
                 <a:solidFill>
                   <a:srgbClr val="FFFFFF"/>
                 </a:solidFill>
                 <a:latin typeface="Malgun Gothic"/>
-                <a:ea typeface="Malgun Gothic"/>
-              </a:rPr>
-              <a:t>?? ?? ??</a:t>
+                <a:ea typeface="맑은 고딕"/>
+              </a:rPr>
+              <a:t>게임 진행 흐름</a:t>
             </a:r>
           </a:p>
         </p:txBody>
@@ -3170,15 +3267,15 @@
           <a:p>
             <a:pPr algn="l"/>
             <a:r>
-              <a:rPr lang="ko-KR" sz="1700" dirty="0">
+              <a:rPr lang="ko-KR" sz="1650" dirty="0">
                 <a:b/>
                 <a:solidFill>
-                  <a:srgbClr val="28D8E8"/>
-                </a:solidFill>
-                <a:latin typeface="Malgun Gothic"/>
-                <a:ea typeface="Malgun Gothic"/>
-              </a:rPr>
-              <a:t>??, ??, ??, ???? ??? ???</a:t>
+                  <a:srgbClr val="27D7E7"/>
+                </a:solidFill>
+                <a:latin typeface="Malgun Gothic"/>
+                <a:ea typeface="맑은 고딕"/>
+              </a:rPr>
+              <a:t>탐색, 복원, 선택, 심문으로 이어지는 기억 처리 루프입니다.</a:t>
             </a:r>
           </a:p>
         </p:txBody>
@@ -3191,18 +3288,18 @@
         </p:nvSpPr>
         <p:spPr>
           <a:xfrm>
-            <a:off x="7050000" y="1670000"/>
-            <a:ext cx="4350000" cy="3420000"/>
+            <a:off x="7000000" y="1660000"/>
+            <a:ext cx="4380000" cy="3450000"/>
           </a:xfrm>
           <a:prstGeom prst="roundRect">
             <a:avLst/>
           </a:prstGeom>
           <a:solidFill>
-            <a:srgbClr val="0A141B"/>
+            <a:srgbClr val="08141B"/>
           </a:solidFill>
           <a:ln w="19050">
             <a:solidFill>
-              <a:srgbClr val="28D8E8"/>
+              <a:srgbClr val="27D7E7"/>
             </a:solidFill>
             <a:prstDash val="dash"/>
           </a:ln>
@@ -3213,27 +3310,27 @@
           <a:p>
             <a:pPr algn="ctr"/>
             <a:r>
-              <a:rPr lang="ko-KR" sz="1650" dirty="0">
+              <a:rPr lang="ko-KR" sz="1600" dirty="0">
                 <a:solidFill>
                   <a:srgbClr val="9FB4C0"/>
                 </a:solidFill>
                 <a:latin typeface="Malgun Gothic"/>
-                <a:ea typeface="Malgun Gothic"/>
-              </a:rPr>
-              <a:t>[???? ?? ??]</a:t>
+                <a:ea typeface="맑은 고딕"/>
+              </a:rPr>
+              <a:t>[스크린샷 삽입 예정]</a:t>
             </a:r>
           </a:p>
           <a:p>
             <a:pPr algn="ctr"/>
             <a:r>
-              <a:rPr lang="ko-KR" sz="1650" dirty="0">
+              <a:rPr lang="ko-KR" sz="1600" dirty="0">
                 <a:solidFill>
                   <a:srgbClr val="9FB4C0"/>
                 </a:solidFill>
                 <a:latin typeface="Malgun Gothic"/>
-                <a:ea typeface="Malgun Gothic"/>
-              </a:rPr>
-              <a:t>?? ??? ?? 4?? ??</a:t>
+                <a:ea typeface="맑은 고딕"/>
+              </a:rPr>
+              <a:t>게임 루프 다이어그램</a:t>
             </a:r>
           </a:p>
         </p:txBody>
@@ -3246,18 +3343,18 @@
         </p:nvSpPr>
         <p:spPr>
           <a:xfrm>
-            <a:off x="620000" y="2050000"/>
-            <a:ext cx="1450000" cy="720000"/>
+            <a:off x="600000" y="2050000"/>
+            <a:ext cx="1050000" cy="650000"/>
           </a:xfrm>
           <a:prstGeom prst="roundRect">
             <a:avLst/>
           </a:prstGeom>
           <a:solidFill>
-            <a:srgbClr val="0E2230"/>
+            <a:srgbClr val="0D2230"/>
           </a:solidFill>
           <a:ln w="19050">
             <a:solidFill>
-              <a:srgbClr val="28D8E8"/>
+              <a:srgbClr val="27D7E7"/>
             </a:solidFill>
           </a:ln>
         </p:spPr>
@@ -3267,61 +3364,39 @@
           <a:p>
             <a:pPr algn="ctr"/>
             <a:r>
-              <a:rPr lang="ko-KR" sz="1800" dirty="0">
+              <a:rPr lang="ko-KR" sz="1450" dirty="0">
                 <a:b/>
                 <a:solidFill>
                   <a:srgbClr val="FFFFFF"/>
                 </a:solidFill>
                 <a:latin typeface="Malgun Gothic"/>
-                <a:ea typeface="Malgun Gothic"/>
-              </a:rPr>
-              <a:t>??</a:t>
-            </a:r>
-          </a:p>
-        </p:txBody>
-      </p:sp>
-      <p:sp>
-        <p:nvSpPr>
-          <p:cNvPr id="10" name="arrow 0"/>
-          <p:cNvSpPr/>
-          <p:nvPr/>
-        </p:nvSpPr>
-        <p:spPr>
-          <a:xfrm>
-            <a:off x="2130000" y="2335000"/>
-            <a:ext cx="160000" cy="80000"/>
-          </a:xfrm>
-          <a:prstGeom prst="rect">
-            <a:avLst/>
-          </a:prstGeom>
-          <a:solidFill>
-            <a:srgbClr val="28D8E8"/>
-          </a:solidFill>
-          <a:ln>
-            <a:noFill/>
-          </a:ln>
-        </p:spPr>
-      </p:sp>
-      <p:sp>
-        <p:nvSpPr>
-          <p:cNvPr id="11" name="flow 1"/>
-          <p:cNvSpPr/>
-          <p:nvPr/>
-        </p:nvSpPr>
-        <p:spPr>
-          <a:xfrm>
-            <a:off x="2200000" y="2050000"/>
-            <a:ext cx="1450000" cy="720000"/>
+                <a:ea typeface="맑은 고딕"/>
+              </a:rPr>
+              <a:t>탐색</a:t>
+            </a:r>
+          </a:p>
+        </p:txBody>
+      </p:sp>
+      <p:sp>
+        <p:nvSpPr>
+          <p:cNvPr id="10" name="flow 1"/>
+          <p:cNvSpPr/>
+          <p:nvPr/>
+        </p:nvSpPr>
+        <p:spPr>
+          <a:xfrm>
+            <a:off x="1820000" y="2050000"/>
+            <a:ext cx="1050000" cy="650000"/>
           </a:xfrm>
           <a:prstGeom prst="roundRect">
             <a:avLst/>
           </a:prstGeom>
           <a:solidFill>
-            <a:srgbClr val="0E2230"/>
+            <a:srgbClr val="0D2230"/>
           </a:solidFill>
           <a:ln w="19050">
             <a:solidFill>
-              <a:srgbClr val="28D8E8"/>
+              <a:srgbClr val="27D7E7"/>
             </a:solidFill>
           </a:ln>
         </p:spPr>
@@ -3331,61 +3406,39 @@
           <a:p>
             <a:pPr algn="ctr"/>
             <a:r>
-              <a:rPr lang="ko-KR" sz="1800" dirty="0">
+              <a:rPr lang="ko-KR" sz="1450" dirty="0">
                 <a:b/>
                 <a:solidFill>
                   <a:srgbClr val="FFFFFF"/>
                 </a:solidFill>
                 <a:latin typeface="Malgun Gothic"/>
-                <a:ea typeface="Malgun Gothic"/>
-              </a:rPr>
-              <a:t>??</a:t>
-            </a:r>
-          </a:p>
-        </p:txBody>
-      </p:sp>
-      <p:sp>
-        <p:nvSpPr>
-          <p:cNvPr id="12" name="arrow 1"/>
-          <p:cNvSpPr/>
-          <p:nvPr/>
-        </p:nvSpPr>
-        <p:spPr>
-          <a:xfrm>
-            <a:off x="3710000" y="2335000"/>
-            <a:ext cx="160000" cy="80000"/>
-          </a:xfrm>
-          <a:prstGeom prst="rect">
-            <a:avLst/>
-          </a:prstGeom>
-          <a:solidFill>
-            <a:srgbClr val="28D8E8"/>
-          </a:solidFill>
-          <a:ln>
-            <a:noFill/>
-          </a:ln>
-        </p:spPr>
-      </p:sp>
-      <p:sp>
-        <p:nvSpPr>
-          <p:cNvPr id="13" name="flow 2"/>
-          <p:cNvSpPr/>
-          <p:nvPr/>
-        </p:nvSpPr>
-        <p:spPr>
-          <a:xfrm>
-            <a:off x="3780000" y="2050000"/>
-            <a:ext cx="1450000" cy="720000"/>
+                <a:ea typeface="맑은 고딕"/>
+              </a:rPr>
+              <a:t>회수</a:t>
+            </a:r>
+          </a:p>
+        </p:txBody>
+      </p:sp>
+      <p:sp>
+        <p:nvSpPr>
+          <p:cNvPr id="11" name="flow 2"/>
+          <p:cNvSpPr/>
+          <p:nvPr/>
+        </p:nvSpPr>
+        <p:spPr>
+          <a:xfrm>
+            <a:off x="3040000" y="2050000"/>
+            <a:ext cx="1050000" cy="650000"/>
           </a:xfrm>
           <a:prstGeom prst="roundRect">
             <a:avLst/>
           </a:prstGeom>
           <a:solidFill>
-            <a:srgbClr val="0E2230"/>
+            <a:srgbClr val="0D2230"/>
           </a:solidFill>
           <a:ln w="19050">
             <a:solidFill>
-              <a:srgbClr val="28D8E8"/>
+              <a:srgbClr val="27D7E7"/>
             </a:solidFill>
           </a:ln>
         </p:spPr>
@@ -3395,61 +3448,39 @@
           <a:p>
             <a:pPr algn="ctr"/>
             <a:r>
-              <a:rPr lang="ko-KR" sz="1800" dirty="0">
+              <a:rPr lang="ko-KR" sz="1450" dirty="0">
                 <a:b/>
                 <a:solidFill>
                   <a:srgbClr val="FFFFFF"/>
                 </a:solidFill>
                 <a:latin typeface="Malgun Gothic"/>
-                <a:ea typeface="Malgun Gothic"/>
-              </a:rPr>
-              <a:t>??</a:t>
-            </a:r>
-          </a:p>
-        </p:txBody>
-      </p:sp>
-      <p:sp>
-        <p:nvSpPr>
-          <p:cNvPr id="14" name="arrow 2"/>
-          <p:cNvSpPr/>
-          <p:nvPr/>
-        </p:nvSpPr>
-        <p:spPr>
-          <a:xfrm>
-            <a:off x="5290000" y="2335000"/>
-            <a:ext cx="160000" cy="80000"/>
-          </a:xfrm>
-          <a:prstGeom prst="rect">
-            <a:avLst/>
-          </a:prstGeom>
-          <a:solidFill>
-            <a:srgbClr val="28D8E8"/>
-          </a:solidFill>
-          <a:ln>
-            <a:noFill/>
-          </a:ln>
-        </p:spPr>
-      </p:sp>
-      <p:sp>
-        <p:nvSpPr>
-          <p:cNvPr id="15" name="flow 3"/>
-          <p:cNvSpPr/>
-          <p:nvPr/>
-        </p:nvSpPr>
-        <p:spPr>
-          <a:xfrm>
-            <a:off x="5360000" y="2050000"/>
-            <a:ext cx="1450000" cy="720000"/>
+                <a:ea typeface="맑은 고딕"/>
+              </a:rPr>
+              <a:t>복원</a:t>
+            </a:r>
+          </a:p>
+        </p:txBody>
+      </p:sp>
+      <p:sp>
+        <p:nvSpPr>
+          <p:cNvPr id="12" name="flow 3"/>
+          <p:cNvSpPr/>
+          <p:nvPr/>
+        </p:nvSpPr>
+        <p:spPr>
+          <a:xfrm>
+            <a:off x="4260000" y="2050000"/>
+            <a:ext cx="1050000" cy="650000"/>
           </a:xfrm>
           <a:prstGeom prst="roundRect">
             <a:avLst/>
           </a:prstGeom>
           <a:solidFill>
-            <a:srgbClr val="0E2230"/>
+            <a:srgbClr val="0D2230"/>
           </a:solidFill>
           <a:ln w="19050">
             <a:solidFill>
-              <a:srgbClr val="28D8E8"/>
+              <a:srgbClr val="27D7E7"/>
             </a:solidFill>
           </a:ln>
         </p:spPr>
@@ -3459,123 +3490,39 @@
           <a:p>
             <a:pPr algn="ctr"/>
             <a:r>
-              <a:rPr lang="ko-KR" sz="1800" dirty="0">
+              <a:rPr lang="ko-KR" sz="1450" dirty="0">
                 <a:b/>
                 <a:solidFill>
                   <a:srgbClr val="FFFFFF"/>
                 </a:solidFill>
                 <a:latin typeface="Malgun Gothic"/>
-                <a:ea typeface="Malgun Gothic"/>
-              </a:rPr>
-              <a:t>??/??</a:t>
-            </a:r>
-          </a:p>
-        </p:txBody>
-      </p:sp>
-      <p:sp>
-        <p:nvSpPr>
-          <p:cNvPr id="16" name="bullets"/>
-          <p:cNvSpPr/>
-          <p:nvPr/>
-        </p:nvSpPr>
-        <p:spPr>
-          <a:xfrm>
-            <a:off x="700000" y="3300000"/>
-            <a:ext cx="5900000" cy="1800000"/>
-          </a:xfrm>
-          <a:prstGeom prst="rect">
-            <a:avLst/>
-          </a:prstGeom>
-          <a:noFill/>
-          <a:ln>
-            <a:noFill/>
-          </a:ln>
-        </p:spPr>
-        <p:txBody>
-          <a:bodyPr wrap="square" anchor="mid"/>
-          <a:lstStyle/>
-          <a:p>
-            <a:pPr marL="342900" indent="-228600" algn="l">
-              <a:buChar char="?"/>
-            </a:pPr>
-            <a:r>
-              <a:rPr lang="ko-KR" sz="1450" dirty="0">
-                <a:solidFill>
-                  <a:srgbClr val="F2F8FF"/>
-                </a:solidFill>
-                <a:latin typeface="Malgun Gothic"/>
-                <a:ea typeface="Malgun Gothic"/>
-              </a:rPr>
-              <a:t>1. ?? ?? ?? ??</a:t>
-            </a:r>
-          </a:p>
-          <a:p>
-            <a:pPr marL="342900" indent="-228600" algn="l">
-              <a:buChar char="?"/>
-            </a:pPr>
-            <a:r>
-              <a:rPr lang="ko-KR" sz="1450" dirty="0">
-                <a:solidFill>
-                  <a:srgbClr val="F2F8FF"/>
-                </a:solidFill>
-                <a:latin typeface="Malgun Gothic"/>
-                <a:ea typeface="Malgun Gothic"/>
-              </a:rPr>
-              <a:t>2. ??/?? ??? ??</a:t>
-            </a:r>
-          </a:p>
-          <a:p>
-            <a:pPr marL="342900" indent="-228600" algn="l">
-              <a:buChar char="?"/>
-            </a:pPr>
-            <a:r>
-              <a:rPr lang="ko-KR" sz="1450" dirty="0">
-                <a:solidFill>
-                  <a:srgbClr val="F2F8FF"/>
-                </a:solidFill>
-                <a:latin typeface="Malgun Gothic"/>
-                <a:ea typeface="Malgun Gothic"/>
-              </a:rPr>
-              <a:t>3. ??/??/??? ??</a:t>
-            </a:r>
-          </a:p>
-          <a:p>
-            <a:pPr marL="342900" indent="-228600" algn="l">
-              <a:buChar char="?"/>
-            </a:pPr>
-            <a:r>
-              <a:rPr lang="ko-KR" sz="1450" dirty="0">
-                <a:solidFill>
-                  <a:srgbClr val="F2F8FF"/>
-                </a:solidFill>
-                <a:latin typeface="Malgun Gothic"/>
-                <a:ea typeface="Malgun Gothic"/>
-              </a:rPr>
-              <a:t>4. ?? ?? 3? ?? ? ?? ???? ??/??</a:t>
-            </a:r>
-          </a:p>
-        </p:txBody>
-      </p:sp>
-      <p:sp>
-        <p:nvSpPr>
-          <p:cNvPr id="17" name="time"/>
-          <p:cNvSpPr/>
-          <p:nvPr/>
-        </p:nvSpPr>
-        <p:spPr>
-          <a:xfrm>
-            <a:off x="690000" y="6020000"/>
-            <a:ext cx="2500000" cy="320000"/>
+                <a:ea typeface="맑은 고딕"/>
+              </a:rPr>
+              <a:t>선택</a:t>
+            </a:r>
+          </a:p>
+        </p:txBody>
+      </p:sp>
+      <p:sp>
+        <p:nvSpPr>
+          <p:cNvPr id="13" name="flow 4"/>
+          <p:cNvSpPr/>
+          <p:nvPr/>
+        </p:nvSpPr>
+        <p:spPr>
+          <a:xfrm>
+            <a:off x="5480000" y="2050000"/>
+            <a:ext cx="1050000" cy="650000"/>
           </a:xfrm>
           <a:prstGeom prst="roundRect">
             <a:avLst/>
           </a:prstGeom>
           <a:solidFill>
-            <a:srgbClr val="0E2230"/>
+            <a:srgbClr val="0D2230"/>
           </a:solidFill>
           <a:ln w="19050">
             <a:solidFill>
-              <a:srgbClr val="5F7783"/>
+              <a:srgbClr val="27D7E7"/>
             </a:solidFill>
           </a:ln>
         </p:spPr>
@@ -3585,28 +3532,184 @@
           <a:p>
             <a:pPr algn="ctr"/>
             <a:r>
-              <a:rPr lang="ko-KR" sz="1200" dirty="0">
+              <a:rPr lang="ko-KR" sz="1450" dirty="0">
+                <a:b/>
+                <a:solidFill>
+                  <a:srgbClr val="FFFFFF"/>
+                </a:solidFill>
+                <a:latin typeface="Malgun Gothic"/>
+                <a:ea typeface="맑은 고딕"/>
+              </a:rPr>
+              <a:t>심문/엔딩</a:t>
+            </a:r>
+          </a:p>
+        </p:txBody>
+      </p:sp>
+      <p:sp>
+        <p:nvSpPr>
+          <p:cNvPr id="14" name="flow note"/>
+          <p:cNvSpPr/>
+          <p:nvPr/>
+        </p:nvSpPr>
+        <p:spPr>
+          <a:xfrm>
+            <a:off x="680000" y="3100000"/>
+            <a:ext cx="5900000" cy="1500000"/>
+          </a:xfrm>
+          <a:prstGeom prst="rect">
+            <a:avLst/>
+          </a:prstGeom>
+          <a:noFill/>
+          <a:ln>
+            <a:noFill/>
+          </a:ln>
+        </p:spPr>
+        <p:txBody>
+          <a:bodyPr wrap="square" anchor="mid"/>
+          <a:lstStyle/>
+          <a:p>
+            <a:pPr marL="342900" indent="-228600" algn="l">
+              <a:buChar char="•"/>
+            </a:pPr>
+            <a:r>
+              <a:rPr lang="ko-KR" sz="1280" dirty="0">
+                <a:solidFill>
+                  <a:srgbClr val="F2F8FF"/>
+                </a:solidFill>
+                <a:latin typeface="Malgun Gothic"/>
+                <a:ea typeface="맑은 고딕"/>
+              </a:rPr>
+              <a:t>폐도시 탐색</a:t>
+            </a:r>
+          </a:p>
+          <a:p>
+            <a:pPr marL="342900" indent="-228600" algn="l">
+              <a:buChar char="•"/>
+            </a:pPr>
+            <a:r>
+              <a:rPr lang="ko-KR" sz="1280" dirty="0">
+                <a:solidFill>
+                  <a:srgbClr val="F2F8FF"/>
+                </a:solidFill>
+                <a:latin typeface="Malgun Gothic"/>
+                <a:ea typeface="맑은 고딕"/>
+              </a:rPr>
+              <a:t>기억 구체 회수</a:t>
+            </a:r>
+          </a:p>
+          <a:p>
+            <a:pPr marL="342900" indent="-228600" algn="l">
+              <a:buChar char="•"/>
+            </a:pPr>
+            <a:r>
+              <a:rPr lang="ko-KR" sz="1280" dirty="0">
+                <a:solidFill>
+                  <a:srgbClr val="F2F8FF"/>
+                </a:solidFill>
+                <a:latin typeface="Malgun Gothic"/>
+                <a:ea typeface="맑은 고딕"/>
+              </a:rPr>
+              <a:t>기억 복원 퍼즐</a:t>
+            </a:r>
+          </a:p>
+          <a:p>
+            <a:pPr marL="342900" indent="-228600" algn="l">
+              <a:buChar char="•"/>
+            </a:pPr>
+            <a:r>
+              <a:rPr lang="ko-KR" sz="1280" dirty="0">
+                <a:solidFill>
+                  <a:srgbClr val="F2F8FF"/>
+                </a:solidFill>
+                <a:latin typeface="Malgun Gothic"/>
+                <a:ea typeface="맑은 고딕"/>
+              </a:rPr>
+              <a:t>보존 / 삭제 / 재가공 선택</a:t>
+            </a:r>
+          </a:p>
+          <a:p>
+            <a:pPr marL="342900" indent="-228600" algn="l">
+              <a:buChar char="•"/>
+            </a:pPr>
+            <a:r>
+              <a:rPr lang="ko-KR" sz="1280" dirty="0">
+                <a:solidFill>
+                  <a:srgbClr val="F2F8FF"/>
+                </a:solidFill>
+                <a:latin typeface="Malgun Gothic"/>
+                <a:ea typeface="맑은 고딕"/>
+              </a:rPr>
+              <a:t>처리 완료 3개 이상</a:t>
+            </a:r>
+          </a:p>
+          <a:p>
+            <a:pPr marL="342900" indent="-228600" algn="l">
+              <a:buChar char="•"/>
+            </a:pPr>
+            <a:r>
+              <a:rPr lang="ko-KR" sz="1280" dirty="0">
+                <a:solidFill>
+                  <a:srgbClr val="F2F8FF"/>
+                </a:solidFill>
+                <a:latin typeface="Malgun Gothic"/>
+                <a:ea typeface="맑은 고딕"/>
+              </a:rPr>
+              <a:t>중앙 아카이브 심문 / 엔딩</a:t>
+            </a:r>
+          </a:p>
+        </p:txBody>
+      </p:sp>
+      <p:sp>
+        <p:nvSpPr>
+          <p:cNvPr id="15" name="time"/>
+          <p:cNvSpPr/>
+          <p:nvPr/>
+        </p:nvSpPr>
+        <p:spPr>
+          <a:xfrm>
+            <a:off x="690000" y="6040000"/>
+            <a:ext cx="2500000" cy="310000"/>
+          </a:xfrm>
+          <a:prstGeom prst="roundRect">
+            <a:avLst/>
+          </a:prstGeom>
+          <a:solidFill>
+            <a:srgbClr val="0D2230"/>
+          </a:solidFill>
+          <a:ln w="19050">
+            <a:solidFill>
+              <a:srgbClr val="5D7480"/>
+            </a:solidFill>
+          </a:ln>
+        </p:spPr>
+        <p:txBody>
+          <a:bodyPr wrap="square" anchor="mid"/>
+          <a:lstStyle/>
+          <a:p>
+            <a:pPr algn="ctr"/>
+            <a:r>
+              <a:rPr lang="ko-KR" sz="1150" dirty="0">
                 <a:solidFill>
                   <a:srgbClr val="9FB4C0"/>
                 </a:solidFill>
                 <a:latin typeface="Malgun Gothic"/>
-                <a:ea typeface="Malgun Gothic"/>
-              </a:rPr>
-              <a:t>?? ?? ??: 30?</a:t>
-            </a:r>
-          </a:p>
-        </p:txBody>
-      </p:sp>
-      <p:sp>
-        <p:nvSpPr>
-          <p:cNvPr id="18" name="footer"/>
-          <p:cNvSpPr/>
-          <p:nvPr/>
-        </p:nvSpPr>
-        <p:spPr>
-          <a:xfrm>
-            <a:off x="7700000" y="6060000"/>
-            <a:ext cx="3800000" cy="260000"/>
+                <a:ea typeface="맑은 고딕"/>
+              </a:rPr>
+              <a:t>예상 발표 시간: 30초</a:t>
+            </a:r>
+          </a:p>
+        </p:txBody>
+      </p:sp>
+      <p:sp>
+        <p:nvSpPr>
+          <p:cNvPr id="16" name="footer"/>
+          <p:cNvSpPr/>
+          <p:nvPr/>
+        </p:nvSpPr>
+        <p:spPr>
+          <a:xfrm>
+            <a:off x="7600000" y="6090000"/>
+            <a:ext cx="3920000" cy="240000"/>
           </a:xfrm>
           <a:prstGeom prst="rect">
             <a:avLst/>
@@ -3622,14 +3725,14 @@
           <a:p>
             <a:pPr algn="l"/>
             <a:r>
-              <a:rPr lang="ko-KR" sz="1050" dirty="0">
-                <a:solidFill>
-                  <a:srgbClr val="5F7783"/>
-                </a:solidFill>
-                <a:latin typeface="Malgun Gothic"/>
-                <a:ea typeface="Malgun Gothic"/>
-              </a:rPr>
-              <a:t>Memory Recycler 3D | 7? ?? ?? ??</a:t>
+              <a:rPr lang="ko-KR" sz="1000" dirty="0">
+                <a:solidFill>
+                  <a:srgbClr val="5D7480"/>
+                </a:solidFill>
+                <a:latin typeface="Malgun Gothic"/>
+                <a:ea typeface="맑은 고딕"/>
+              </a:rPr>
+              <a:t>Memory Recycler 3D | 7분 최종 발표 초안</a:t>
             </a:r>
           </a:p>
         </p:txBody>
@@ -3661,7 +3764,7 @@
       </p:grpSpPr>
       <p:sp>
         <p:nvSpPr>
-          <p:cNvPr id="2" name="bg panel"/>
+          <p:cNvPr id="2" name="background"/>
           <p:cNvSpPr/>
           <p:nvPr/>
         </p:nvSpPr>
@@ -3690,29 +3793,29 @@
         <p:spPr>
           <a:xfrm>
             <a:off x="0" y="0"/>
-            <a:ext cx="12192000" cy="90000"/>
-          </a:xfrm>
-          <a:prstGeom prst="rect">
-            <a:avLst/>
-          </a:prstGeom>
-          <a:solidFill>
-            <a:srgbClr val="28D8E8"/>
-          </a:solidFill>
-          <a:ln>
-            <a:noFill/>
-          </a:ln>
-        </p:spPr>
-      </p:sp>
-      <p:sp>
-        <p:nvSpPr>
-          <p:cNvPr id="4" name="lens glow"/>
-          <p:cNvSpPr/>
-          <p:nvPr/>
-        </p:nvSpPr>
-        <p:spPr>
-          <a:xfrm>
-            <a:off x="10000000" y="250000"/>
-            <a:ext cx="1500000" cy="1500000"/>
+            <a:ext cx="12192000" cy="85000"/>
+          </a:xfrm>
+          <a:prstGeom prst="rect">
+            <a:avLst/>
+          </a:prstGeom>
+          <a:solidFill>
+            <a:srgbClr val="27D7E7"/>
+          </a:solidFill>
+          <a:ln>
+            <a:noFill/>
+          </a:ln>
+        </p:spPr>
+      </p:sp>
+      <p:sp>
+        <p:nvSpPr>
+          <p:cNvPr id="4" name="lens frame"/>
+          <p:cNvSpPr/>
+          <p:nvPr/>
+        </p:nvSpPr>
+        <p:spPr>
+          <a:xfrm>
+            <a:off x="10020000" y="260000"/>
+            <a:ext cx="1350000" cy="1350000"/>
           </a:xfrm>
           <a:prstGeom prst="roundRect">
             <a:avLst/>
@@ -3722,21 +3825,21 @@
           </a:solidFill>
           <a:ln w="19050">
             <a:solidFill>
-              <a:srgbClr val="28D8E8"/>
+              <a:srgbClr val="27D7E7"/>
             </a:solidFill>
           </a:ln>
         </p:spPr>
       </p:sp>
       <p:sp>
         <p:nvSpPr>
-          <p:cNvPr id="5" name="slide no"/>
-          <p:cNvSpPr/>
-          <p:nvPr/>
-        </p:nvSpPr>
-        <p:spPr>
-          <a:xfrm>
-            <a:off x="10800000" y="350000"/>
-            <a:ext cx="700000" cy="280000"/>
+          <p:cNvPr id="5" name="slide number"/>
+          <p:cNvSpPr/>
+          <p:nvPr/>
+        </p:nvSpPr>
+        <p:spPr>
+          <a:xfrm>
+            <a:off x="10820000" y="360000"/>
+            <a:ext cx="720000" cy="260000"/>
           </a:xfrm>
           <a:prstGeom prst="rect">
             <a:avLst/>
@@ -3752,12 +3855,12 @@
           <a:p>
             <a:pPr algn="ctr"/>
             <a:r>
-              <a:rPr lang="ko-KR" sz="1300" dirty="0">
+              <a:rPr lang="ko-KR" sz="1200" dirty="0">
                 <a:solidFill>
                   <a:srgbClr val="9FB4C0"/>
                 </a:solidFill>
                 <a:latin typeface="Malgun Gothic"/>
-                <a:ea typeface="Malgun Gothic"/>
+                <a:ea typeface="맑은 고딕"/>
               </a:rPr>
               <a:t>06/12</a:t>
             </a:r>
@@ -3789,15 +3892,15 @@
           <a:p>
             <a:pPr algn="l"/>
             <a:r>
-              <a:rPr lang="ko-KR" sz="2850" dirty="0">
+              <a:rPr lang="ko-KR" sz="2900" dirty="0">
                 <a:b/>
                 <a:solidFill>
                   <a:srgbClr val="FFFFFF"/>
                 </a:solidFill>
                 <a:latin typeface="Malgun Gothic"/>
-                <a:ea typeface="Malgun Gothic"/>
-              </a:rPr>
-              <a:t>?? ?? ?? 3?</a:t>
+                <a:ea typeface="맑은 고딕"/>
+              </a:rPr>
+              <a:t>기억 렌즈 퍼즐 3종</a:t>
             </a:r>
           </a:p>
         </p:txBody>
@@ -3827,15 +3930,15 @@
           <a:p>
             <a:pPr algn="l"/>
             <a:r>
-              <a:rPr lang="ko-KR" sz="1700" dirty="0">
+              <a:rPr lang="ko-KR" sz="1650" dirty="0">
                 <a:b/>
                 <a:solidFill>
-                  <a:srgbClr val="28D8E8"/>
-                </a:solidFill>
-                <a:latin typeface="Malgun Gothic"/>
-                <a:ea typeface="Malgun Gothic"/>
-              </a:rPr>
-              <a:t>???, ???, ???? ??? ????</a:t>
+                  <a:srgbClr val="27D7E7"/>
+                </a:solidFill>
+                <a:latin typeface="Malgun Gothic"/>
+                <a:ea typeface="맑은 고딕"/>
+              </a:rPr>
+              <a:t>세 기억은 각각 다른 방식으로 렌즈를 사용합니다.</a:t>
             </a:r>
           </a:p>
         </p:txBody>
@@ -3848,18 +3951,18 @@
         </p:nvSpPr>
         <p:spPr>
           <a:xfrm>
-            <a:off x="7050000" y="1670000"/>
-            <a:ext cx="4350000" cy="3420000"/>
+            <a:off x="7000000" y="1660000"/>
+            <a:ext cx="4380000" cy="3450000"/>
           </a:xfrm>
           <a:prstGeom prst="roundRect">
             <a:avLst/>
           </a:prstGeom>
           <a:solidFill>
-            <a:srgbClr val="0A141B"/>
+            <a:srgbClr val="08141B"/>
           </a:solidFill>
           <a:ln w="19050">
             <a:solidFill>
-              <a:srgbClr val="28D8E8"/>
+              <a:srgbClr val="27D7E7"/>
             </a:solidFill>
             <a:prstDash val="dash"/>
           </a:ln>
@@ -3870,51 +3973,135 @@
           <a:p>
             <a:pPr algn="ctr"/>
             <a:r>
-              <a:rPr lang="ko-KR" sz="1650" dirty="0">
+              <a:rPr lang="ko-KR" sz="1600" dirty="0">
                 <a:solidFill>
                   <a:srgbClr val="9FB4C0"/>
                 </a:solidFill>
                 <a:latin typeface="Malgun Gothic"/>
-                <a:ea typeface="Malgun Gothic"/>
-              </a:rPr>
-              <a:t>[???? ?? ??]</a:t>
+                <a:ea typeface="맑은 고딕"/>
+              </a:rPr>
+              <a:t>[스크린샷 삽입 예정]</a:t>
             </a:r>
           </a:p>
           <a:p>
             <a:pPr algn="ctr"/>
             <a:r>
-              <a:rPr lang="ko-KR" sz="1650" dirty="0">
+              <a:rPr lang="ko-KR" sz="1600" dirty="0">
                 <a:solidFill>
                   <a:srgbClr val="9FB4C0"/>
                 </a:solidFill>
                 <a:latin typeface="Malgun Gothic"/>
-                <a:ea typeface="Malgun Gothic"/>
-              </a:rPr>
-              <a:t>MR3D_002 / MR3D_003 / MR3D_006 3?? ??</a:t>
-            </a:r>
-          </a:p>
-        </p:txBody>
-      </p:sp>
-      <p:sp>
-        <p:nvSpPr>
-          <p:cNvPr id="9" name="MR3D_002"/>
-          <p:cNvSpPr/>
-          <p:nvPr/>
-        </p:nvSpPr>
-        <p:spPr>
-          <a:xfrm>
-            <a:off x="620000" y="1930000"/>
-            <a:ext cx="1850000" cy="1100000"/>
+                <a:ea typeface="맑은 고딕"/>
+              </a:rPr>
+              <a:t>LensAlign / LensOcclude / Stillness 3분할</a:t>
+            </a:r>
+          </a:p>
+        </p:txBody>
+      </p:sp>
+      <p:sp>
+        <p:nvSpPr>
+          <p:cNvPr id="9" name="bullets"/>
+          <p:cNvSpPr/>
+          <p:nvPr/>
+        </p:nvSpPr>
+        <p:spPr>
+          <a:xfrm>
+            <a:off x="690000" y="1820000"/>
+            <a:ext cx="5850000" cy="3250000"/>
+          </a:xfrm>
+          <a:prstGeom prst="rect">
+            <a:avLst/>
+          </a:prstGeom>
+          <a:noFill/>
+          <a:ln>
+            <a:noFill/>
+          </a:ln>
+        </p:spPr>
+        <p:txBody>
+          <a:bodyPr wrap="square" anchor="mid"/>
+          <a:lstStyle/>
+          <a:p>
+            <a:pPr marL="342900" indent="-228600" algn="l">
+              <a:buChar char="•"/>
+            </a:pPr>
+            <a:r>
+              <a:rPr lang="ko-KR" sz="1450" dirty="0">
+                <a:solidFill>
+                  <a:srgbClr val="F2F8FF"/>
+                </a:solidFill>
+                <a:latin typeface="Malgun Gothic"/>
+                <a:ea typeface="맑은 고딕"/>
+              </a:rPr>
+              <a:t>MR3D_002 LensAlign: 빈칸을 월드 대상과 겹치기</a:t>
+            </a:r>
+          </a:p>
+          <a:p>
+            <a:pPr marL="342900" indent="-228600" algn="l">
+              <a:buChar char="•"/>
+            </a:pPr>
+            <a:r>
+              <a:rPr lang="ko-KR" sz="1450" dirty="0">
+                <a:solidFill>
+                  <a:srgbClr val="F2F8FF"/>
+                </a:solidFill>
+                <a:latin typeface="Malgun Gothic"/>
+                <a:ea typeface="맑은 고딕"/>
+              </a:rPr>
+              <a:t>MR3D_003 LensOcclude: 거짓 문장을 구조물로 가리기</a:t>
+            </a:r>
+          </a:p>
+          <a:p>
+            <a:pPr marL="342900" indent="-228600" algn="l">
+              <a:buChar char="•"/>
+            </a:pPr>
+            <a:r>
+              <a:rPr lang="ko-KR" sz="1450" dirty="0">
+                <a:solidFill>
+                  <a:srgbClr val="F2F8FF"/>
+                </a:solidFill>
+                <a:latin typeface="Malgun Gothic"/>
+                <a:ea typeface="맑은 고딕"/>
+              </a:rPr>
+              <a:t>MR3D_006 Stillness: 움직이지 않고 빈 파일 읽기</a:t>
+            </a:r>
+          </a:p>
+          <a:p>
+            <a:pPr marL="342900" indent="-228600" algn="l">
+              <a:buChar char="•"/>
+            </a:pPr>
+            <a:r>
+              <a:rPr lang="ko-KR" sz="1450" dirty="0">
+                <a:solidFill>
+                  <a:srgbClr val="F2F8FF"/>
+                </a:solidFill>
+                <a:latin typeface="Malgun Gothic"/>
+                <a:ea typeface="맑은 고딕"/>
+              </a:rPr>
+              <a:t>일반 기억은 Sequence 퍼즐로 복원</a:t>
+            </a:r>
+          </a:p>
+        </p:txBody>
+      </p:sp>
+      <p:sp>
+        <p:nvSpPr>
+          <p:cNvPr id="10" name="time"/>
+          <p:cNvSpPr/>
+          <p:nvPr/>
+        </p:nvSpPr>
+        <p:spPr>
+          <a:xfrm>
+            <a:off x="690000" y="6040000"/>
+            <a:ext cx="2500000" cy="310000"/>
           </a:xfrm>
           <a:prstGeom prst="roundRect">
             <a:avLst/>
           </a:prstGeom>
           <a:solidFill>
-            <a:srgbClr val="0E2230"/>
+            <a:srgbClr val="0D2230"/>
           </a:solidFill>
           <a:ln w="19050">
             <a:solidFill>
-              <a:srgbClr val="28D8E8"/>
+              <a:srgbClr val="5D7480"/>
             </a:solidFill>
           </a:ln>
         </p:spPr>
@@ -3924,247 +4111,28 @@
           <a:p>
             <a:pPr algn="ctr"/>
             <a:r>
-              <a:rPr lang="ko-KR" sz="1350" dirty="0">
-                <a:solidFill>
-                  <a:srgbClr val="FFFFFF"/>
-                </a:solidFill>
-                <a:latin typeface="Malgun Gothic"/>
-                <a:ea typeface="Malgun Gothic"/>
-              </a:rPr>
-              <a:t>MR3D_002</a:t>
-            </a:r>
-          </a:p>
-          <a:p>
-            <a:pPr algn="ctr"/>
-            <a:r>
-              <a:rPr lang="ko-KR" sz="1350" dirty="0">
-                <a:solidFill>
-                  <a:srgbClr val="FFFFFF"/>
-                </a:solidFill>
-                <a:latin typeface="Malgun Gothic"/>
-                <a:ea typeface="Malgun Gothic"/>
-              </a:rPr>
-              <a:t>LensAlign
-?? ??</a:t>
-            </a:r>
-          </a:p>
-        </p:txBody>
-      </p:sp>
-      <p:sp>
-        <p:nvSpPr>
-          <p:cNvPr id="10" name="MR3D_003"/>
-          <p:cNvSpPr/>
-          <p:nvPr/>
-        </p:nvSpPr>
-        <p:spPr>
-          <a:xfrm>
-            <a:off x="2670000" y="1930000"/>
-            <a:ext cx="1850000" cy="1100000"/>
-          </a:xfrm>
-          <a:prstGeom prst="roundRect">
-            <a:avLst/>
-          </a:prstGeom>
-          <a:solidFill>
-            <a:srgbClr val="0E2230"/>
-          </a:solidFill>
-          <a:ln w="19050">
-            <a:solidFill>
-              <a:srgbClr val="28D8E8"/>
-            </a:solidFill>
-          </a:ln>
-        </p:spPr>
-        <p:txBody>
-          <a:bodyPr wrap="square" anchor="mid"/>
-          <a:lstStyle/>
-          <a:p>
-            <a:pPr algn="ctr"/>
-            <a:r>
-              <a:rPr lang="ko-KR" sz="1350" dirty="0">
-                <a:solidFill>
-                  <a:srgbClr val="FFFFFF"/>
-                </a:solidFill>
-                <a:latin typeface="Malgun Gothic"/>
-                <a:ea typeface="Malgun Gothic"/>
-              </a:rPr>
-              <a:t>MR3D_003</a:t>
-            </a:r>
-          </a:p>
-          <a:p>
-            <a:pPr algn="ctr"/>
-            <a:r>
-              <a:rPr lang="ko-KR" sz="1350" dirty="0">
-                <a:solidFill>
-                  <a:srgbClr val="FFFFFF"/>
-                </a:solidFill>
-                <a:latin typeface="Malgun Gothic"/>
-                <a:ea typeface="Malgun Gothic"/>
-              </a:rPr>
-              <a:t>LensOcclude
-??? ?? ??</a:t>
-            </a:r>
-          </a:p>
-        </p:txBody>
-      </p:sp>
-      <p:sp>
-        <p:nvSpPr>
-          <p:cNvPr id="11" name="MR3D_006"/>
-          <p:cNvSpPr/>
-          <p:nvPr/>
-        </p:nvSpPr>
-        <p:spPr>
-          <a:xfrm>
-            <a:off x="4720000" y="1930000"/>
-            <a:ext cx="1850000" cy="1100000"/>
-          </a:xfrm>
-          <a:prstGeom prst="roundRect">
-            <a:avLst/>
-          </a:prstGeom>
-          <a:solidFill>
-            <a:srgbClr val="0E2230"/>
-          </a:solidFill>
-          <a:ln w="19050">
-            <a:solidFill>
-              <a:srgbClr val="28D8E8"/>
-            </a:solidFill>
-          </a:ln>
-        </p:spPr>
-        <p:txBody>
-          <a:bodyPr wrap="square" anchor="mid"/>
-          <a:lstStyle/>
-          <a:p>
-            <a:pPr algn="ctr"/>
-            <a:r>
-              <a:rPr lang="ko-KR" sz="1350" dirty="0">
-                <a:solidFill>
-                  <a:srgbClr val="FFFFFF"/>
-                </a:solidFill>
-                <a:latin typeface="Malgun Gothic"/>
-                <a:ea typeface="Malgun Gothic"/>
-              </a:rPr>
-              <a:t>MR3D_006</a:t>
-            </a:r>
-          </a:p>
-          <a:p>
-            <a:pPr algn="ctr"/>
-            <a:r>
-              <a:rPr lang="ko-KR" sz="1350" dirty="0">
-                <a:solidFill>
-                  <a:srgbClr val="FFFFFF"/>
-                </a:solidFill>
-                <a:latin typeface="Malgun Gothic"/>
-                <a:ea typeface="Malgun Gothic"/>
-              </a:rPr>
-              <a:t>Stillness
-???? ? ??</a:t>
-            </a:r>
-          </a:p>
-        </p:txBody>
-      </p:sp>
-      <p:sp>
-        <p:nvSpPr>
-          <p:cNvPr id="12" name="bullets"/>
-          <p:cNvSpPr/>
-          <p:nvPr/>
-        </p:nvSpPr>
-        <p:spPr>
-          <a:xfrm>
-            <a:off x="700000" y="3450000"/>
-            <a:ext cx="5900000" cy="1500000"/>
-          </a:xfrm>
-          <a:prstGeom prst="rect">
-            <a:avLst/>
-          </a:prstGeom>
-          <a:noFill/>
-          <a:ln>
-            <a:noFill/>
-          </a:ln>
-        </p:spPr>
-        <p:txBody>
-          <a:bodyPr wrap="square" anchor="mid"/>
-          <a:lstStyle/>
-          <a:p>
-            <a:pPr marL="342900" indent="-228600" algn="l">
-              <a:buChar char="?"/>
-            </a:pPr>
-            <a:r>
-              <a:rPr lang="ko-KR" sz="1450" dirty="0">
-                <a:solidFill>
-                  <a:srgbClr val="F2F8FF"/>
-                </a:solidFill>
-                <a:latin typeface="Malgun Gothic"/>
-                <a:ea typeface="Malgun Gothic"/>
-              </a:rPr>
-              <a:t>?? ??? Sequence fallback ??</a:t>
-            </a:r>
-          </a:p>
-          <a:p>
-            <a:pPr marL="342900" indent="-228600" algn="l">
-              <a:buChar char="?"/>
-            </a:pPr>
-            <a:r>
-              <a:rPr lang="ko-KR" sz="1450" dirty="0">
-                <a:solidFill>
-                  <a:srgbClr val="F2F8FF"/>
-                </a:solidFill>
-                <a:latin typeface="Malgun Gothic"/>
-                <a:ea typeface="Malgun Gothic"/>
-              </a:rPr>
-              <a:t>???? ??? ??? ??? ??</a:t>
-            </a:r>
-          </a:p>
-        </p:txBody>
-      </p:sp>
-      <p:sp>
-        <p:nvSpPr>
-          <p:cNvPr id="13" name="time"/>
-          <p:cNvSpPr/>
-          <p:nvPr/>
-        </p:nvSpPr>
-        <p:spPr>
-          <a:xfrm>
-            <a:off x="690000" y="6020000"/>
-            <a:ext cx="2500000" cy="320000"/>
-          </a:xfrm>
-          <a:prstGeom prst="roundRect">
-            <a:avLst/>
-          </a:prstGeom>
-          <a:solidFill>
-            <a:srgbClr val="0E2230"/>
-          </a:solidFill>
-          <a:ln w="19050">
-            <a:solidFill>
-              <a:srgbClr val="5F7783"/>
-            </a:solidFill>
-          </a:ln>
-        </p:spPr>
-        <p:txBody>
-          <a:bodyPr wrap="square" anchor="mid"/>
-          <a:lstStyle/>
-          <a:p>
-            <a:pPr algn="ctr"/>
-            <a:r>
-              <a:rPr lang="ko-KR" sz="1200" dirty="0">
+              <a:rPr lang="ko-KR" sz="1150" dirty="0">
                 <a:solidFill>
                   <a:srgbClr val="9FB4C0"/>
                 </a:solidFill>
                 <a:latin typeface="Malgun Gothic"/>
-                <a:ea typeface="Malgun Gothic"/>
-              </a:rPr>
-              <a:t>?? ?? ??: 35?</a:t>
-            </a:r>
-          </a:p>
-        </p:txBody>
-      </p:sp>
-      <p:sp>
-        <p:nvSpPr>
-          <p:cNvPr id="14" name="footer"/>
-          <p:cNvSpPr/>
-          <p:nvPr/>
-        </p:nvSpPr>
-        <p:spPr>
-          <a:xfrm>
-            <a:off x="7700000" y="6060000"/>
-            <a:ext cx="3800000" cy="260000"/>
+                <a:ea typeface="맑은 고딕"/>
+              </a:rPr>
+              <a:t>예상 발표 시간: 35초</a:t>
+            </a:r>
+          </a:p>
+        </p:txBody>
+      </p:sp>
+      <p:sp>
+        <p:nvSpPr>
+          <p:cNvPr id="11" name="footer"/>
+          <p:cNvSpPr/>
+          <p:nvPr/>
+        </p:nvSpPr>
+        <p:spPr>
+          <a:xfrm>
+            <a:off x="7600000" y="6090000"/>
+            <a:ext cx="3920000" cy="240000"/>
           </a:xfrm>
           <a:prstGeom prst="rect">
             <a:avLst/>
@@ -4180,14 +4148,14 @@
           <a:p>
             <a:pPr algn="l"/>
             <a:r>
-              <a:rPr lang="ko-KR" sz="1050" dirty="0">
-                <a:solidFill>
-                  <a:srgbClr val="5F7783"/>
-                </a:solidFill>
-                <a:latin typeface="Malgun Gothic"/>
-                <a:ea typeface="Malgun Gothic"/>
-              </a:rPr>
-              <a:t>Memory Recycler 3D | 7? ?? ?? ??</a:t>
+              <a:rPr lang="ko-KR" sz="1000" dirty="0">
+                <a:solidFill>
+                  <a:srgbClr val="5D7480"/>
+                </a:solidFill>
+                <a:latin typeface="Malgun Gothic"/>
+                <a:ea typeface="맑은 고딕"/>
+              </a:rPr>
+              <a:t>Memory Recycler 3D | 7분 최종 발표 초안</a:t>
             </a:r>
           </a:p>
         </p:txBody>
@@ -4219,7 +4187,7 @@
       </p:grpSpPr>
       <p:sp>
         <p:nvSpPr>
-          <p:cNvPr id="2" name="bg panel"/>
+          <p:cNvPr id="2" name="background"/>
           <p:cNvSpPr/>
           <p:nvPr/>
         </p:nvSpPr>
@@ -4248,29 +4216,29 @@
         <p:spPr>
           <a:xfrm>
             <a:off x="0" y="0"/>
-            <a:ext cx="12192000" cy="90000"/>
-          </a:xfrm>
-          <a:prstGeom prst="rect">
-            <a:avLst/>
-          </a:prstGeom>
-          <a:solidFill>
-            <a:srgbClr val="28D8E8"/>
-          </a:solidFill>
-          <a:ln>
-            <a:noFill/>
-          </a:ln>
-        </p:spPr>
-      </p:sp>
-      <p:sp>
-        <p:nvSpPr>
-          <p:cNvPr id="4" name="lens glow"/>
-          <p:cNvSpPr/>
-          <p:nvPr/>
-        </p:nvSpPr>
-        <p:spPr>
-          <a:xfrm>
-            <a:off x="10000000" y="250000"/>
-            <a:ext cx="1500000" cy="1500000"/>
+            <a:ext cx="12192000" cy="85000"/>
+          </a:xfrm>
+          <a:prstGeom prst="rect">
+            <a:avLst/>
+          </a:prstGeom>
+          <a:solidFill>
+            <a:srgbClr val="27D7E7"/>
+          </a:solidFill>
+          <a:ln>
+            <a:noFill/>
+          </a:ln>
+        </p:spPr>
+      </p:sp>
+      <p:sp>
+        <p:nvSpPr>
+          <p:cNvPr id="4" name="lens frame"/>
+          <p:cNvSpPr/>
+          <p:nvPr/>
+        </p:nvSpPr>
+        <p:spPr>
+          <a:xfrm>
+            <a:off x="10020000" y="260000"/>
+            <a:ext cx="1350000" cy="1350000"/>
           </a:xfrm>
           <a:prstGeom prst="roundRect">
             <a:avLst/>
@@ -4280,21 +4248,21 @@
           </a:solidFill>
           <a:ln w="19050">
             <a:solidFill>
-              <a:srgbClr val="28D8E8"/>
+              <a:srgbClr val="27D7E7"/>
             </a:solidFill>
           </a:ln>
         </p:spPr>
       </p:sp>
       <p:sp>
         <p:nvSpPr>
-          <p:cNvPr id="5" name="slide no"/>
-          <p:cNvSpPr/>
-          <p:nvPr/>
-        </p:nvSpPr>
-        <p:spPr>
-          <a:xfrm>
-            <a:off x="10800000" y="350000"/>
-            <a:ext cx="700000" cy="280000"/>
+          <p:cNvPr id="5" name="slide number"/>
+          <p:cNvSpPr/>
+          <p:nvPr/>
+        </p:nvSpPr>
+        <p:spPr>
+          <a:xfrm>
+            <a:off x="10820000" y="360000"/>
+            <a:ext cx="720000" cy="260000"/>
           </a:xfrm>
           <a:prstGeom prst="rect">
             <a:avLst/>
@@ -4310,12 +4278,12 @@
           <a:p>
             <a:pPr algn="ctr"/>
             <a:r>
-              <a:rPr lang="ko-KR" sz="1300" dirty="0">
+              <a:rPr lang="ko-KR" sz="1200" dirty="0">
                 <a:solidFill>
                   <a:srgbClr val="9FB4C0"/>
                 </a:solidFill>
                 <a:latin typeface="Malgun Gothic"/>
-                <a:ea typeface="Malgun Gothic"/>
+                <a:ea typeface="맑은 고딕"/>
               </a:rPr>
               <a:t>07/12</a:t>
             </a:r>
@@ -4347,15 +4315,15 @@
           <a:p>
             <a:pPr algn="l"/>
             <a:r>
-              <a:rPr lang="ko-KR" sz="2850" dirty="0">
+              <a:rPr lang="ko-KR" sz="2900" dirty="0">
                 <a:b/>
                 <a:solidFill>
                   <a:srgbClr val="FFFFFF"/>
                 </a:solidFill>
                 <a:latin typeface="Malgun Gothic"/>
-                <a:ea typeface="Malgun Gothic"/>
-              </a:rPr>
-              <a:t>?? / ?? / ???</a:t>
+                <a:ea typeface="맑은 고딕"/>
+              </a:rPr>
+              <a:t>보존 / 삭제 / 재가공</a:t>
             </a:r>
           </a:p>
         </p:txBody>
@@ -4385,15 +4353,15 @@
           <a:p>
             <a:pPr algn="l"/>
             <a:r>
-              <a:rPr lang="ko-KR" sz="1700" dirty="0">
+              <a:rPr lang="ko-KR" sz="1650" dirty="0">
                 <a:b/>
                 <a:solidFill>
-                  <a:srgbClr val="28D8E8"/>
-                </a:solidFill>
-                <a:latin typeface="Malgun Gothic"/>
-                <a:ea typeface="Malgun Gothic"/>
-              </a:rPr>
-              <a:t>??? ??? ?? ??? ???</a:t>
+                  <a:srgbClr val="27D7E7"/>
+                </a:solidFill>
+                <a:latin typeface="Malgun Gothic"/>
+                <a:ea typeface="맑은 고딕"/>
+              </a:rPr>
+              <a:t>같은 기억도 선택에 따라 엔딩에서 다른 형태로 증언합니다.</a:t>
             </a:r>
           </a:p>
         </p:txBody>
@@ -4406,18 +4374,18 @@
         </p:nvSpPr>
         <p:spPr>
           <a:xfrm>
-            <a:off x="7050000" y="1670000"/>
-            <a:ext cx="4350000" cy="3420000"/>
+            <a:off x="7000000" y="1660000"/>
+            <a:ext cx="4380000" cy="3450000"/>
           </a:xfrm>
           <a:prstGeom prst="roundRect">
             <a:avLst/>
           </a:prstGeom>
           <a:solidFill>
-            <a:srgbClr val="0A141B"/>
+            <a:srgbClr val="08141B"/>
           </a:solidFill>
           <a:ln w="19050">
             <a:solidFill>
-              <a:srgbClr val="28D8E8"/>
+              <a:srgbClr val="27D7E7"/>
             </a:solidFill>
             <a:prstDash val="dash"/>
           </a:ln>
@@ -4428,27 +4396,27 @@
           <a:p>
             <a:pPr algn="ctr"/>
             <a:r>
-              <a:rPr lang="ko-KR" sz="1650" dirty="0">
+              <a:rPr lang="ko-KR" sz="1600" dirty="0">
                 <a:solidFill>
                   <a:srgbClr val="9FB4C0"/>
                 </a:solidFill>
                 <a:latin typeface="Malgun Gothic"/>
-                <a:ea typeface="Malgun Gothic"/>
-              </a:rPr>
-              <a:t>[???? ?? ??]</a:t>
+                <a:ea typeface="맑은 고딕"/>
+              </a:rPr>
+              <a:t>[스크린샷 삽입 예정]</a:t>
             </a:r>
           </a:p>
           <a:p>
             <a:pPr algn="ctr"/>
             <a:r>
-              <a:rPr lang="ko-KR" sz="1650" dirty="0">
+              <a:rPr lang="ko-KR" sz="1600" dirty="0">
                 <a:solidFill>
                   <a:srgbClr val="9FB4C0"/>
                 </a:solidFill>
                 <a:latin typeface="Malgun Gothic"/>
-                <a:ea typeface="Malgun Gothic"/>
-              </a:rPr>
-              <a:t>??/??/??? ?? UI</a:t>
+                <a:ea typeface="맑은 고딕"/>
+              </a:rPr>
+              <a:t>보존/삭제/재가공 선택 UI</a:t>
             </a:r>
           </a:p>
         </p:txBody>
@@ -4461,8 +4429,8 @@
         </p:nvSpPr>
         <p:spPr>
           <a:xfrm>
-            <a:off x="690000" y="1800000"/>
-            <a:ext cx="5850000" cy="3300000"/>
+            <a:off x="690000" y="1820000"/>
+            <a:ext cx="5850000" cy="3250000"/>
           </a:xfrm>
           <a:prstGeom prst="rect">
             <a:avLst/>
@@ -4477,47 +4445,62 @@
           <a:lstStyle/>
           <a:p>
             <a:pPr marL="342900" indent="-228600" algn="l">
-              <a:buChar char="?"/>
+              <a:buChar char="•"/>
             </a:pPr>
             <a:r>
-              <a:rPr lang="ko-KR" sz="1500" dirty="0">
+              <a:rPr lang="ko-KR" sz="1450" dirty="0">
                 <a:solidFill>
                   <a:srgbClr val="F2F8FF"/>
                 </a:solidFill>
                 <a:latin typeface="Malgun Gothic"/>
-                <a:ea typeface="Malgun Gothic"/>
-              </a:rPr>
-              <a:t>??: ?? ?? ??</a:t>
+                <a:ea typeface="맑은 고딕"/>
+              </a:rPr>
+              <a:t>보존: 원본 기억을 그대로 남김</a:t>
             </a:r>
           </a:p>
           <a:p>
             <a:pPr marL="342900" indent="-228600" algn="l">
-              <a:buChar char="?"/>
+              <a:buChar char="•"/>
             </a:pPr>
             <a:r>
-              <a:rPr lang="ko-KR" sz="1500" dirty="0">
+              <a:rPr lang="ko-KR" sz="1450" dirty="0">
                 <a:solidFill>
                   <a:srgbClr val="F2F8FF"/>
                 </a:solidFill>
                 <a:latin typeface="Malgun Gothic"/>
-                <a:ea typeface="Malgun Gothic"/>
-              </a:rPr>
-              <a:t>??: ?? ?? ???, ?? ??</a:t>
+                <a:ea typeface="맑은 고딕"/>
+              </a:rPr>
+              <a:t>삭제: 증언이 공백으로 처리됨</a:t>
             </a:r>
           </a:p>
           <a:p>
             <a:pPr marL="342900" indent="-228600" algn="l">
-              <a:buChar char="?"/>
+              <a:buChar char="•"/>
             </a:pPr>
             <a:r>
-              <a:rPr lang="ko-KR" sz="1500" dirty="0">
+              <a:rPr lang="ko-KR" sz="1450" dirty="0">
                 <a:solidFill>
                   <a:srgbClr val="F2F8FF"/>
                 </a:solidFill>
                 <a:latin typeface="Malgun Gothic"/>
-                <a:ea typeface="Malgun Gothic"/>
-              </a:rPr>
-              <a:t>???: ???? ???? ??, ?? ???</a:t>
+                <a:ea typeface="맑은 고딕"/>
+              </a:rPr>
+              <a:t>재가공: 견딜 수 있는 이야기로 바뀌지만 기록 불일치가 남음</a:t>
+            </a:r>
+          </a:p>
+          <a:p>
+            <a:pPr marL="342900" indent="-228600" algn="l">
+              <a:buChar char="•"/>
+            </a:pPr>
+            <a:r>
+              <a:rPr lang="ko-KR" sz="1450" dirty="0">
+                <a:solidFill>
+                  <a:srgbClr val="F2F8FF"/>
+                </a:solidFill>
+                <a:latin typeface="Malgun Gothic"/>
+                <a:ea typeface="맑은 고딕"/>
+              </a:rPr>
+              <a:t>선택 결과가 아카이브 증언에 반영</a:t>
             </a:r>
           </a:p>
         </p:txBody>
@@ -4530,18 +4513,18 @@
         </p:nvSpPr>
         <p:spPr>
           <a:xfrm>
-            <a:off x="690000" y="6020000"/>
-            <a:ext cx="2500000" cy="320000"/>
+            <a:off x="690000" y="6040000"/>
+            <a:ext cx="2500000" cy="310000"/>
           </a:xfrm>
           <a:prstGeom prst="roundRect">
             <a:avLst/>
           </a:prstGeom>
           <a:solidFill>
-            <a:srgbClr val="0E2230"/>
+            <a:srgbClr val="0D2230"/>
           </a:solidFill>
           <a:ln w="19050">
             <a:solidFill>
-              <a:srgbClr val="5F7783"/>
+              <a:srgbClr val="5D7480"/>
             </a:solidFill>
           </a:ln>
         </p:spPr>
@@ -4551,14 +4534,14 @@
           <a:p>
             <a:pPr algn="ctr"/>
             <a:r>
-              <a:rPr lang="ko-KR" sz="1200" dirty="0">
+              <a:rPr lang="ko-KR" sz="1150" dirty="0">
                 <a:solidFill>
                   <a:srgbClr val="9FB4C0"/>
                 </a:solidFill>
                 <a:latin typeface="Malgun Gothic"/>
-                <a:ea typeface="Malgun Gothic"/>
-              </a:rPr>
-              <a:t>?? ?? ??: 25?</a:t>
+                <a:ea typeface="맑은 고딕"/>
+              </a:rPr>
+              <a:t>예상 발표 시간: 25초</a:t>
             </a:r>
           </a:p>
         </p:txBody>
@@ -4571,8 +4554,8 @@
         </p:nvSpPr>
         <p:spPr>
           <a:xfrm>
-            <a:off x="7700000" y="6060000"/>
-            <a:ext cx="3800000" cy="260000"/>
+            <a:off x="7600000" y="6090000"/>
+            <a:ext cx="3920000" cy="240000"/>
           </a:xfrm>
           <a:prstGeom prst="rect">
             <a:avLst/>
@@ -4588,14 +4571,14 @@
           <a:p>
             <a:pPr algn="l"/>
             <a:r>
-              <a:rPr lang="ko-KR" sz="1050" dirty="0">
-                <a:solidFill>
-                  <a:srgbClr val="5F7783"/>
-                </a:solidFill>
-                <a:latin typeface="Malgun Gothic"/>
-                <a:ea typeface="Malgun Gothic"/>
-              </a:rPr>
-              <a:t>Memory Recycler 3D | 7? ?? ?? ??</a:t>
+              <a:rPr lang="ko-KR" sz="1000" dirty="0">
+                <a:solidFill>
+                  <a:srgbClr val="5D7480"/>
+                </a:solidFill>
+                <a:latin typeface="Malgun Gothic"/>
+                <a:ea typeface="맑은 고딕"/>
+              </a:rPr>
+              <a:t>Memory Recycler 3D | 7분 최종 발표 초안</a:t>
             </a:r>
           </a:p>
         </p:txBody>
@@ -4627,7 +4610,7 @@
       </p:grpSpPr>
       <p:sp>
         <p:nvSpPr>
-          <p:cNvPr id="2" name="bg panel"/>
+          <p:cNvPr id="2" name="background"/>
           <p:cNvSpPr/>
           <p:nvPr/>
         </p:nvSpPr>
@@ -4656,29 +4639,29 @@
         <p:spPr>
           <a:xfrm>
             <a:off x="0" y="0"/>
-            <a:ext cx="12192000" cy="90000"/>
-          </a:xfrm>
-          <a:prstGeom prst="rect">
-            <a:avLst/>
-          </a:prstGeom>
-          <a:solidFill>
-            <a:srgbClr val="28D8E8"/>
-          </a:solidFill>
-          <a:ln>
-            <a:noFill/>
-          </a:ln>
-        </p:spPr>
-      </p:sp>
-      <p:sp>
-        <p:nvSpPr>
-          <p:cNvPr id="4" name="lens glow"/>
-          <p:cNvSpPr/>
-          <p:nvPr/>
-        </p:nvSpPr>
-        <p:spPr>
-          <a:xfrm>
-            <a:off x="10000000" y="250000"/>
-            <a:ext cx="1500000" cy="1500000"/>
+            <a:ext cx="12192000" cy="85000"/>
+          </a:xfrm>
+          <a:prstGeom prst="rect">
+            <a:avLst/>
+          </a:prstGeom>
+          <a:solidFill>
+            <a:srgbClr val="27D7E7"/>
+          </a:solidFill>
+          <a:ln>
+            <a:noFill/>
+          </a:ln>
+        </p:spPr>
+      </p:sp>
+      <p:sp>
+        <p:nvSpPr>
+          <p:cNvPr id="4" name="lens frame"/>
+          <p:cNvSpPr/>
+          <p:nvPr/>
+        </p:nvSpPr>
+        <p:spPr>
+          <a:xfrm>
+            <a:off x="10020000" y="260000"/>
+            <a:ext cx="1350000" cy="1350000"/>
           </a:xfrm>
           <a:prstGeom prst="roundRect">
             <a:avLst/>
@@ -4688,21 +4671,21 @@
           </a:solidFill>
           <a:ln w="19050">
             <a:solidFill>
-              <a:srgbClr val="28D8E8"/>
+              <a:srgbClr val="27D7E7"/>
             </a:solidFill>
           </a:ln>
         </p:spPr>
       </p:sp>
       <p:sp>
         <p:nvSpPr>
-          <p:cNvPr id="5" name="slide no"/>
-          <p:cNvSpPr/>
-          <p:nvPr/>
-        </p:nvSpPr>
-        <p:spPr>
-          <a:xfrm>
-            <a:off x="10800000" y="350000"/>
-            <a:ext cx="700000" cy="280000"/>
+          <p:cNvPr id="5" name="slide number"/>
+          <p:cNvSpPr/>
+          <p:nvPr/>
+        </p:nvSpPr>
+        <p:spPr>
+          <a:xfrm>
+            <a:off x="10820000" y="360000"/>
+            <a:ext cx="720000" cy="260000"/>
           </a:xfrm>
           <a:prstGeom prst="rect">
             <a:avLst/>
@@ -4718,12 +4701,12 @@
           <a:p>
             <a:pPr algn="ctr"/>
             <a:r>
-              <a:rPr lang="ko-KR" sz="1300" dirty="0">
+              <a:rPr lang="ko-KR" sz="1200" dirty="0">
                 <a:solidFill>
                   <a:srgbClr val="9FB4C0"/>
                 </a:solidFill>
                 <a:latin typeface="Malgun Gothic"/>
-                <a:ea typeface="Malgun Gothic"/>
+                <a:ea typeface="맑은 고딕"/>
               </a:rPr>
               <a:t>08/12</a:t>
             </a:r>
@@ -4755,15 +4738,15 @@
           <a:p>
             <a:pPr algn="l"/>
             <a:r>
-              <a:rPr lang="ko-KR" sz="2850" dirty="0">
+              <a:rPr lang="ko-KR" sz="2900" dirty="0">
                 <a:b/>
                 <a:solidFill>
                   <a:srgbClr val="FFFFFF"/>
                 </a:solidFill>
                 <a:latin typeface="Malgun Gothic"/>
-                <a:ea typeface="Malgun Gothic"/>
-              </a:rPr>
-              <a:t>PlayerMemoryLog? ???? ??</a:t>
+                <a:ea typeface="맑은 고딕"/>
+              </a:rPr>
+              <a:t>PlayerMemoryLog와 아카이브 심문</a:t>
             </a:r>
           </a:p>
         </p:txBody>
@@ -4793,15 +4776,15 @@
           <a:p>
             <a:pPr algn="l"/>
             <a:r>
-              <a:rPr lang="ko-KR" sz="1700" dirty="0">
+              <a:rPr lang="ko-KR" sz="1650" dirty="0">
                 <a:b/>
                 <a:solidFill>
-                  <a:srgbClr val="28D8E8"/>
-                </a:solidFill>
-                <a:latin typeface="Malgun Gothic"/>
-                <a:ea typeface="Malgun Gothic"/>
-              </a:rPr>
-              <a:t>????? ????? ???? ????</a:t>
+                  <a:srgbClr val="27D7E7"/>
+                </a:solidFill>
+                <a:latin typeface="Malgun Gothic"/>
+                <a:ea typeface="맑은 고딕"/>
+              </a:rPr>
+              <a:t>플레이어가 기억을 처리한다고 생각하지만 게임은 플레이어의 행동도 기억합니다.</a:t>
             </a:r>
           </a:p>
         </p:txBody>
@@ -4814,18 +4797,18 @@
         </p:nvSpPr>
         <p:spPr>
           <a:xfrm>
-            <a:off x="7050000" y="1670000"/>
-            <a:ext cx="4350000" cy="3420000"/>
+            <a:off x="7000000" y="1660000"/>
+            <a:ext cx="4380000" cy="3450000"/>
           </a:xfrm>
           <a:prstGeom prst="roundRect">
             <a:avLst/>
           </a:prstGeom>
           <a:solidFill>
-            <a:srgbClr val="0A141B"/>
+            <a:srgbClr val="08141B"/>
           </a:solidFill>
           <a:ln w="19050">
             <a:solidFill>
-              <a:srgbClr val="28D8E8"/>
+              <a:srgbClr val="27D7E7"/>
             </a:solidFill>
             <a:prstDash val="dash"/>
           </a:ln>
@@ -4836,27 +4819,27 @@
           <a:p>
             <a:pPr algn="ctr"/>
             <a:r>
-              <a:rPr lang="ko-KR" sz="1650" dirty="0">
+              <a:rPr lang="ko-KR" sz="1600" dirty="0">
                 <a:solidFill>
                   <a:srgbClr val="9FB4C0"/>
                 </a:solidFill>
                 <a:latin typeface="Malgun Gothic"/>
-                <a:ea typeface="Malgun Gothic"/>
-              </a:rPr>
-              <a:t>[???? ?? ??]</a:t>
+                <a:ea typeface="맑은 고딕"/>
+              </a:rPr>
+              <a:t>[스크린샷 삽입 예정]</a:t>
             </a:r>
           </a:p>
           <a:p>
             <a:pPr algn="ctr"/>
             <a:r>
-              <a:rPr lang="ko-KR" sz="1650" dirty="0">
+              <a:rPr lang="ko-KR" sz="1600" dirty="0">
                 <a:solidFill>
                   <a:srgbClr val="9FB4C0"/>
                 </a:solidFill>
                 <a:latin typeface="Malgun Gothic"/>
-                <a:ea typeface="Malgun Gothic"/>
-              </a:rPr>
-              <a:t>???? ???? ?? UI</a:t>
+                <a:ea typeface="맑은 고딕"/>
+              </a:rPr>
+              <a:t>아카이브 자기기록 심문 UI</a:t>
             </a:r>
           </a:p>
         </p:txBody>
@@ -4869,8 +4852,8 @@
         </p:nvSpPr>
         <p:spPr>
           <a:xfrm>
-            <a:off x="690000" y="1800000"/>
-            <a:ext cx="5850000" cy="3300000"/>
+            <a:off x="690000" y="1820000"/>
+            <a:ext cx="5850000" cy="3250000"/>
           </a:xfrm>
           <a:prstGeom prst="rect">
             <a:avLst/>
@@ -4885,62 +4868,62 @@
           <a:lstStyle/>
           <a:p>
             <a:pPr marL="342900" indent="-228600" algn="l">
-              <a:buChar char="?"/>
+              <a:buChar char="•"/>
             </a:pPr>
             <a:r>
-              <a:rPr lang="ko-KR" sz="1500" dirty="0">
+              <a:rPr lang="ko-KR" sz="1450" dirty="0">
                 <a:solidFill>
                   <a:srgbClr val="F2F8FF"/>
                 </a:solidFill>
                 <a:latin typeface="Malgun Gothic"/>
-                <a:ea typeface="Malgun Gothic"/>
-              </a:rPr>
-              <a:t>? ??? ?? ?? ??</a:t>
+                <a:ea typeface="맑은 고딕"/>
+              </a:rPr>
+              <a:t>첫 선택, 처리 방식, 퍼즐 오답, 렌즈 복원 방식 기록</a:t>
             </a:r>
           </a:p>
           <a:p>
             <a:pPr marL="342900" indent="-228600" algn="l">
-              <a:buChar char="?"/>
+              <a:buChar char="•"/>
             </a:pPr>
             <a:r>
-              <a:rPr lang="ko-KR" sz="1500" dirty="0">
+              <a:rPr lang="ko-KR" sz="1450" dirty="0">
                 <a:solidFill>
                   <a:srgbClr val="F2F8FF"/>
                 </a:solidFill>
                 <a:latin typeface="Malgun Gothic"/>
-                <a:ea typeface="Malgun Gothic"/>
-              </a:rPr>
-              <a:t>?? ??, ?? ??, ?? ?? ??</a:t>
+                <a:ea typeface="맑은 고딕"/>
+              </a:rPr>
+              <a:t>중앙 아카이브에서 플레이어의 행동을 다시 질문</a:t>
             </a:r>
           </a:p>
           <a:p>
             <a:pPr marL="342900" indent="-228600" algn="l">
-              <a:buChar char="?"/>
+              <a:buChar char="•"/>
             </a:pPr>
             <a:r>
-              <a:rPr lang="ko-KR" sz="1500" dirty="0">
+              <a:rPr lang="ko-KR" sz="1450" dirty="0">
                 <a:solidFill>
                   <a:srgbClr val="F2F8FF"/>
                 </a:solidFill>
                 <a:latin typeface="Malgun Gothic"/>
-                <a:ea typeface="Malgun Gothic"/>
-              </a:rPr>
-              <a:t>?? ? ???? ???? ?? ??</a:t>
+                <a:ea typeface="맑은 고딕"/>
+              </a:rPr>
+              <a:t>정답률에 따라 자기기록 일치 / 부분 일치 / 불일치 출력</a:t>
             </a:r>
           </a:p>
           <a:p>
             <a:pPr marL="342900" indent="-228600" algn="l">
-              <a:buChar char="?"/>
+              <a:buChar char="•"/>
             </a:pPr>
             <a:r>
-              <a:rPr lang="ko-KR" sz="1500" dirty="0">
+              <a:rPr lang="ko-KR" sz="1450" dirty="0">
                 <a:solidFill>
                   <a:srgbClr val="F2F8FF"/>
                 </a:solidFill>
                 <a:latin typeface="Malgun Gothic"/>
-                <a:ea typeface="Malgun Gothic"/>
-              </a:rPr>
-              <a:t>??? ???? ????? ???? ??</a:t>
+                <a:ea typeface="맑은 고딕"/>
+              </a:rPr>
+              <a:t>엔딩에서 플레이어의 선택을 회수</a:t>
             </a:r>
           </a:p>
         </p:txBody>
@@ -4953,18 +4936,18 @@
         </p:nvSpPr>
         <p:spPr>
           <a:xfrm>
-            <a:off x="690000" y="6020000"/>
-            <a:ext cx="2500000" cy="320000"/>
+            <a:off x="690000" y="6040000"/>
+            <a:ext cx="2500000" cy="310000"/>
           </a:xfrm>
           <a:prstGeom prst="roundRect">
             <a:avLst/>
           </a:prstGeom>
           <a:solidFill>
-            <a:srgbClr val="0E2230"/>
+            <a:srgbClr val="0D2230"/>
           </a:solidFill>
           <a:ln w="19050">
             <a:solidFill>
-              <a:srgbClr val="5F7783"/>
+              <a:srgbClr val="5D7480"/>
             </a:solidFill>
           </a:ln>
         </p:spPr>
@@ -4974,14 +4957,14 @@
           <a:p>
             <a:pPr algn="ctr"/>
             <a:r>
-              <a:rPr lang="ko-KR" sz="1200" dirty="0">
+              <a:rPr lang="ko-KR" sz="1150" dirty="0">
                 <a:solidFill>
                   <a:srgbClr val="9FB4C0"/>
                 </a:solidFill>
                 <a:latin typeface="Malgun Gothic"/>
-                <a:ea typeface="Malgun Gothic"/>
-              </a:rPr>
-              <a:t>?? ?? ??: 30?</a:t>
+                <a:ea typeface="맑은 고딕"/>
+              </a:rPr>
+              <a:t>예상 발표 시간: 30초</a:t>
             </a:r>
           </a:p>
         </p:txBody>
@@ -4994,8 +4977,8 @@
         </p:nvSpPr>
         <p:spPr>
           <a:xfrm>
-            <a:off x="7700000" y="6060000"/>
-            <a:ext cx="3800000" cy="260000"/>
+            <a:off x="7600000" y="6090000"/>
+            <a:ext cx="3920000" cy="240000"/>
           </a:xfrm>
           <a:prstGeom prst="rect">
             <a:avLst/>
@@ -5011,14 +4994,14 @@
           <a:p>
             <a:pPr algn="l"/>
             <a:r>
-              <a:rPr lang="ko-KR" sz="1050" dirty="0">
-                <a:solidFill>
-                  <a:srgbClr val="5F7783"/>
-                </a:solidFill>
-                <a:latin typeface="Malgun Gothic"/>
-                <a:ea typeface="Malgun Gothic"/>
-              </a:rPr>
-              <a:t>Memory Recycler 3D | 7? ?? ?? ??</a:t>
+              <a:rPr lang="ko-KR" sz="1000" dirty="0">
+                <a:solidFill>
+                  <a:srgbClr val="5D7480"/>
+                </a:solidFill>
+                <a:latin typeface="Malgun Gothic"/>
+                <a:ea typeface="맑은 고딕"/>
+              </a:rPr>
+              <a:t>Memory Recycler 3D | 7분 최종 발표 초안</a:t>
             </a:r>
           </a:p>
         </p:txBody>
@@ -5050,7 +5033,7 @@
       </p:grpSpPr>
       <p:sp>
         <p:nvSpPr>
-          <p:cNvPr id="2" name="bg panel"/>
+          <p:cNvPr id="2" name="background"/>
           <p:cNvSpPr/>
           <p:nvPr/>
         </p:nvSpPr>
@@ -5079,29 +5062,29 @@
         <p:spPr>
           <a:xfrm>
             <a:off x="0" y="0"/>
-            <a:ext cx="12192000" cy="90000"/>
-          </a:xfrm>
-          <a:prstGeom prst="rect">
-            <a:avLst/>
-          </a:prstGeom>
-          <a:solidFill>
-            <a:srgbClr val="28D8E8"/>
-          </a:solidFill>
-          <a:ln>
-            <a:noFill/>
-          </a:ln>
-        </p:spPr>
-      </p:sp>
-      <p:sp>
-        <p:nvSpPr>
-          <p:cNvPr id="4" name="lens glow"/>
-          <p:cNvSpPr/>
-          <p:nvPr/>
-        </p:nvSpPr>
-        <p:spPr>
-          <a:xfrm>
-            <a:off x="10000000" y="250000"/>
-            <a:ext cx="1500000" cy="1500000"/>
+            <a:ext cx="12192000" cy="85000"/>
+          </a:xfrm>
+          <a:prstGeom prst="rect">
+            <a:avLst/>
+          </a:prstGeom>
+          <a:solidFill>
+            <a:srgbClr val="27D7E7"/>
+          </a:solidFill>
+          <a:ln>
+            <a:noFill/>
+          </a:ln>
+        </p:spPr>
+      </p:sp>
+      <p:sp>
+        <p:nvSpPr>
+          <p:cNvPr id="4" name="lens frame"/>
+          <p:cNvSpPr/>
+          <p:nvPr/>
+        </p:nvSpPr>
+        <p:spPr>
+          <a:xfrm>
+            <a:off x="10020000" y="260000"/>
+            <a:ext cx="1350000" cy="1350000"/>
           </a:xfrm>
           <a:prstGeom prst="roundRect">
             <a:avLst/>
@@ -5111,21 +5094,21 @@
           </a:solidFill>
           <a:ln w="19050">
             <a:solidFill>
-              <a:srgbClr val="28D8E8"/>
+              <a:srgbClr val="27D7E7"/>
             </a:solidFill>
           </a:ln>
         </p:spPr>
       </p:sp>
       <p:sp>
         <p:nvSpPr>
-          <p:cNvPr id="5" name="slide no"/>
-          <p:cNvSpPr/>
-          <p:nvPr/>
-        </p:nvSpPr>
-        <p:spPr>
-          <a:xfrm>
-            <a:off x="10800000" y="350000"/>
-            <a:ext cx="700000" cy="280000"/>
+          <p:cNvPr id="5" name="slide number"/>
+          <p:cNvSpPr/>
+          <p:nvPr/>
+        </p:nvSpPr>
+        <p:spPr>
+          <a:xfrm>
+            <a:off x="10820000" y="360000"/>
+            <a:ext cx="720000" cy="260000"/>
           </a:xfrm>
           <a:prstGeom prst="rect">
             <a:avLst/>
@@ -5141,12 +5124,12 @@
           <a:p>
             <a:pPr algn="ctr"/>
             <a:r>
-              <a:rPr lang="ko-KR" sz="1300" dirty="0">
+              <a:rPr lang="ko-KR" sz="1200" dirty="0">
                 <a:solidFill>
                   <a:srgbClr val="9FB4C0"/>
                 </a:solidFill>
                 <a:latin typeface="Malgun Gothic"/>
-                <a:ea typeface="Malgun Gothic"/>
+                <a:ea typeface="맑은 고딕"/>
               </a:rPr>
               <a:t>09/12</a:t>
             </a:r>
@@ -5178,15 +5161,15 @@
           <a:p>
             <a:pPr algn="l"/>
             <a:r>
-              <a:rPr lang="ko-KR" sz="2850" dirty="0">
+              <a:rPr lang="ko-KR" sz="2900" dirty="0">
                 <a:b/>
                 <a:solidFill>
                   <a:srgbClr val="FFFFFF"/>
                 </a:solidFill>
                 <a:latin typeface="Malgun Gothic"/>
-                <a:ea typeface="Malgun Gothic"/>
-              </a:rPr>
-              <a:t>???/??? ??</a:t>
+                <a:ea typeface="맑은 고딕"/>
+              </a:rPr>
+              <a:t>시스템 / 클래스 구조</a:t>
             </a:r>
           </a:p>
         </p:txBody>
@@ -5216,15 +5199,15 @@
           <a:p>
             <a:pPr algn="l"/>
             <a:r>
-              <a:rPr lang="ko-KR" sz="1700" dirty="0">
+              <a:rPr lang="ko-KR" sz="1650" dirty="0">
                 <a:b/>
                 <a:solidFill>
-                  <a:srgbClr val="28D8E8"/>
-                </a:solidFill>
-                <a:latin typeface="Malgun Gothic"/>
-                <a:ea typeface="Malgun Gothic"/>
-              </a:rPr>
-              <a:t>?? ???? ??, ??, ??, ??? ????</a:t>
+                  <a:srgbClr val="27D7E7"/>
+                </a:solidFill>
+                <a:latin typeface="Malgun Gothic"/>
+                <a:ea typeface="맑은 고딕"/>
+              </a:rPr>
+              <a:t>기억 데이터, UI, 로그, 아카이브를 분리해 유지보수 가능한 구조로 구성했습니다.</a:t>
             </a:r>
           </a:p>
         </p:txBody>
@@ -5237,18 +5220,18 @@
         </p:nvSpPr>
         <p:spPr>
           <a:xfrm>
-            <a:off x="7050000" y="1670000"/>
-            <a:ext cx="4350000" cy="3420000"/>
+            <a:off x="7000000" y="1660000"/>
+            <a:ext cx="4380000" cy="3450000"/>
           </a:xfrm>
           <a:prstGeom prst="roundRect">
             <a:avLst/>
           </a:prstGeom>
           <a:solidFill>
-            <a:srgbClr val="0A141B"/>
+            <a:srgbClr val="08141B"/>
           </a:solidFill>
           <a:ln w="19050">
             <a:solidFill>
-              <a:srgbClr val="28D8E8"/>
+              <a:srgbClr val="27D7E7"/>
             </a:solidFill>
             <a:prstDash val="dash"/>
           </a:ln>
@@ -5259,27 +5242,27 @@
           <a:p>
             <a:pPr algn="ctr"/>
             <a:r>
-              <a:rPr lang="ko-KR" sz="1650" dirty="0">
+              <a:rPr lang="ko-KR" sz="1600" dirty="0">
                 <a:solidFill>
                   <a:srgbClr val="9FB4C0"/>
                 </a:solidFill>
                 <a:latin typeface="Malgun Gothic"/>
-                <a:ea typeface="Malgun Gothic"/>
-              </a:rPr>
-              <a:t>[???? ?? ??]</a:t>
+                <a:ea typeface="맑은 고딕"/>
+              </a:rPr>
+              <a:t>[스크린샷 삽입 예정]</a:t>
             </a:r>
           </a:p>
           <a:p>
             <a:pPr algn="ctr"/>
             <a:r>
-              <a:rPr lang="ko-KR" sz="1650" dirty="0">
+              <a:rPr lang="ko-KR" sz="1600" dirty="0">
                 <a:solidFill>
                   <a:srgbClr val="9FB4C0"/>
                 </a:solidFill>
                 <a:latin typeface="Malgun Gothic"/>
-                <a:ea typeface="Malgun Gothic"/>
-              </a:rPr>
-              <a:t>??? ?? ?????</a:t>
+                <a:ea typeface="맑은 고딕"/>
+              </a:rPr>
+              <a:t>시스템 구조도</a:t>
             </a:r>
           </a:p>
         </p:txBody>
@@ -5292,18 +5275,18 @@
         </p:nvSpPr>
         <p:spPr>
           <a:xfrm>
-            <a:off x="620000" y="1750000"/>
-            <a:ext cx="5900000" cy="3050000"/>
+            <a:off x="620000" y="1700000"/>
+            <a:ext cx="5900000" cy="3350000"/>
           </a:xfrm>
           <a:prstGeom prst="roundRect">
             <a:avLst/>
           </a:prstGeom>
           <a:solidFill>
-            <a:srgbClr val="0E2230"/>
+            <a:srgbClr val="0D2230"/>
           </a:solidFill>
           <a:ln w="19050">
             <a:solidFill>
-              <a:srgbClr val="28D8E8"/>
+              <a:srgbClr val="27D7E7"/>
             </a:solidFill>
           </a:ln>
         </p:spPr>
@@ -5313,66 +5296,92 @@
           <a:p>
             <a:pPr algn="l"/>
             <a:r>
-              <a:rPr lang="ko-KR" sz="1250" dirty="0">
+              <a:rPr lang="ko-KR" sz="1220" dirty="0">
                 <a:solidFill>
                   <a:srgbClr val="F2F8FF"/>
                 </a:solidFill>
                 <a:latin typeface="Malgun Gothic"/>
-                <a:ea typeface="Malgun Gothic"/>
-              </a:rPr>
-              <a:t>MemoryManager3D  | ?? ??/?? ??</a:t>
+                <a:ea typeface="맑은 고딕"/>
+              </a:rPr>
+              <a:t>MemoryManager3D: 기억 상태 관리</a:t>
             </a:r>
           </a:p>
           <a:p>
             <a:pPr algn="l"/>
             <a:r>
-              <a:rPr lang="ko-KR" sz="1250" dirty="0">
+              <a:rPr lang="ko-KR" sz="1220" dirty="0">
                 <a:solidFill>
                   <a:srgbClr val="F2F8FF"/>
                 </a:solidFill>
                 <a:latin typeface="Malgun Gothic"/>
-                <a:ea typeface="Malgun Gothic"/>
-              </a:rPr>
-              <a:t>UIManager3D  | HUD/??/??/?? UI</a:t>
+                <a:ea typeface="맑은 고딕"/>
+              </a:rPr>
+              <a:t>MemoryData3D: 기억 데이터</a:t>
             </a:r>
           </a:p>
           <a:p>
             <a:pPr algn="l"/>
             <a:r>
-              <a:rPr lang="ko-KR" sz="1250" dirty="0">
+              <a:rPr lang="ko-KR" sz="1220" dirty="0">
                 <a:solidFill>
                   <a:srgbClr val="F2F8FF"/>
                 </a:solidFill>
                 <a:latin typeface="Malgun Gothic"/>
-                <a:ea typeface="Malgun Gothic"/>
-              </a:rPr>
-              <a:t>MemoryLensEcho3D  | ?? ?? ??</a:t>
+                <a:ea typeface="맑은 고딕"/>
+              </a:rPr>
+              <a:t>MemoryObject3D: 월드 기억 오브젝트</a:t>
             </a:r>
           </a:p>
           <a:p>
             <a:pPr algn="l"/>
             <a:r>
-              <a:rPr lang="ko-KR" sz="1250" dirty="0">
+              <a:rPr lang="ko-KR" sz="1220" dirty="0">
                 <a:solidFill>
                   <a:srgbClr val="F2F8FF"/>
                 </a:solidFill>
                 <a:latin typeface="Malgun Gothic"/>
-                <a:ea typeface="Malgun Gothic"/>
-              </a:rPr>
-              <a:t>PlayerMemoryLog3D  | ??/??/?? ?? ??</a:t>
+                <a:ea typeface="맑은 고딕"/>
+              </a:rPr>
+              <a:t>MemoryLensEcho3D: 월드 공간 기억 UI</a:t>
             </a:r>
           </a:p>
           <a:p>
             <a:pPr algn="l"/>
             <a:r>
-              <a:rPr lang="ko-KR" sz="1250" dirty="0">
+              <a:rPr lang="ko-KR" sz="1220" dirty="0">
                 <a:solidFill>
                   <a:srgbClr val="F2F8FF"/>
                 </a:solidFill>
                 <a:latin typeface="Malgun Gothic"/>
-                <a:ea typeface="Malgun Gothic"/>
-              </a:rPr>
-              <a:t>ArchiveTerminal3D  | ?? ????/?? ??</a:t>
+                <a:ea typeface="맑은 고딕"/>
+              </a:rPr>
+              <a:t>UIManager3D: HUD / 카드 / 퍼즐 / 심문 UI</a:t>
+            </a:r>
+          </a:p>
+          <a:p>
+            <a:pPr algn="l"/>
+            <a:r>
+              <a:rPr lang="ko-KR" sz="1220" dirty="0">
+                <a:solidFill>
+                  <a:srgbClr val="F2F8FF"/>
+                </a:solidFill>
+                <a:latin typeface="Malgun Gothic"/>
+                <a:ea typeface="맑은 고딕"/>
+              </a:rPr>
+              <a:t>PlayerMemoryLog3D: 플레이 행동 기록</a:t>
+            </a:r>
+          </a:p>
+          <a:p>
+            <a:pPr algn="l"/>
+            <a:r>
+              <a:rPr lang="ko-KR" sz="1220" dirty="0">
+                <a:solidFill>
+                  <a:srgbClr val="F2F8FF"/>
+                </a:solidFill>
+                <a:latin typeface="Malgun Gothic"/>
+                <a:ea typeface="맑은 고딕"/>
+              </a:rPr>
+              <a:t>ArchiveTerminal3D: 중앙 아카이브와 엔딩 진입</a:t>
             </a:r>
           </a:p>
         </p:txBody>
@@ -5385,18 +5394,18 @@
         </p:nvSpPr>
         <p:spPr>
           <a:xfrm>
-            <a:off x="690000" y="6020000"/>
-            <a:ext cx="2500000" cy="320000"/>
+            <a:off x="690000" y="6040000"/>
+            <a:ext cx="2500000" cy="310000"/>
           </a:xfrm>
           <a:prstGeom prst="roundRect">
             <a:avLst/>
           </a:prstGeom>
           <a:solidFill>
-            <a:srgbClr val="0E2230"/>
+            <a:srgbClr val="0D2230"/>
           </a:solidFill>
           <a:ln w="19050">
             <a:solidFill>
-              <a:srgbClr val="5F7783"/>
+              <a:srgbClr val="5D7480"/>
             </a:solidFill>
           </a:ln>
         </p:spPr>
@@ -5406,14 +5415,14 @@
           <a:p>
             <a:pPr algn="ctr"/>
             <a:r>
-              <a:rPr lang="ko-KR" sz="1200" dirty="0">
+              <a:rPr lang="ko-KR" sz="1150" dirty="0">
                 <a:solidFill>
                   <a:srgbClr val="9FB4C0"/>
                 </a:solidFill>
                 <a:latin typeface="Malgun Gothic"/>
-                <a:ea typeface="Malgun Gothic"/>
-              </a:rPr>
-              <a:t>?? ?? ??: 30?</a:t>
+                <a:ea typeface="맑은 고딕"/>
+              </a:rPr>
+              <a:t>예상 발표 시간: 30초</a:t>
             </a:r>
           </a:p>
         </p:txBody>
@@ -5426,8 +5435,8 @@
         </p:nvSpPr>
         <p:spPr>
           <a:xfrm>
-            <a:off x="7700000" y="6060000"/>
-            <a:ext cx="3800000" cy="260000"/>
+            <a:off x="7600000" y="6090000"/>
+            <a:ext cx="3920000" cy="240000"/>
           </a:xfrm>
           <a:prstGeom prst="rect">
             <a:avLst/>
@@ -5443,14 +5452,14 @@
           <a:p>
             <a:pPr algn="l"/>
             <a:r>
-              <a:rPr lang="ko-KR" sz="1050" dirty="0">
-                <a:solidFill>
-                  <a:srgbClr val="5F7783"/>
-                </a:solidFill>
-                <a:latin typeface="Malgun Gothic"/>
-                <a:ea typeface="Malgun Gothic"/>
-              </a:rPr>
-              <a:t>Memory Recycler 3D | 7? ?? ?? ??</a:t>
+              <a:rPr lang="ko-KR" sz="1000" dirty="0">
+                <a:solidFill>
+                  <a:srgbClr val="5D7480"/>
+                </a:solidFill>
+                <a:latin typeface="Malgun Gothic"/>
+                <a:ea typeface="맑은 고딕"/>
+              </a:rPr>
+              <a:t>Memory Recycler 3D | 7분 최종 발표 초안</a:t>
             </a:r>
           </a:p>
         </p:txBody>
@@ -5474,13 +5483,13 @@
         <a:srgbClr val="F2F8FF"/>
       </a:lt1>
       <a:dk2>
-        <a:srgbClr val="0E2230"/>
+        <a:srgbClr val="0D2230"/>
       </a:dk2>
       <a:lt2>
         <a:srgbClr val="9FB4C0"/>
       </a:lt2>
       <a:accent1>
-        <a:srgbClr val="28D8E8"/>
+        <a:srgbClr val="27D7E7"/>
       </a:accent1>
       <a:accent2>
         <a:srgbClr val="3B82F6"/>
@@ -5495,10 +5504,10 @@
         <a:srgbClr val="E46D78"/>
       </a:accent5>
       <a:accent6>
-        <a:srgbClr val="5F7783"/>
+        <a:srgbClr val="5D7480"/>
       </a:accent6>
       <a:hlink>
-        <a:srgbClr val="28D8E8"/>
+        <a:srgbClr val="27D7E7"/>
       </a:hlink>
       <a:folHlink>
         <a:srgbClr val="3B82F6"/>
@@ -5507,12 +5516,12 @@
     <a:fontScheme name="MR3D">
       <a:majorFont>
         <a:latin typeface="Malgun Gothic"/>
-        <a:ea typeface="Malgun Gothic"/>
+        <a:ea typeface="맑은 고딕"/>
         <a:cs typeface="Arial"/>
       </a:majorFont>
       <a:minorFont>
         <a:latin typeface="Malgun Gothic"/>
-        <a:ea typeface="Malgun Gothic"/>
+        <a:ea typeface="맑은 고딕"/>
         <a:cs typeface="Arial"/>
       </a:minorFont>
     </a:fontScheme>
